--- a/docs/GuardianIQ_Business_Scenario_QA_Features_Presentation.pptx
+++ b/docs/GuardianIQ_Business_Scenario_QA_Features_Presentation.pptx
@@ -3090,6 +3090,14 @@
 <file path=ppt/slides/slide1.xml><?xml version="1.0" encoding="utf-8"?>
 <p:sld xmlns:a="http://schemas.openxmlformats.org/drawingml/2006/main" xmlns:p="http://schemas.openxmlformats.org/presentationml/2006/main" xmlns:r="http://schemas.openxmlformats.org/officeDocument/2006/relationships">
   <p:cSld>
+    <p:bg>
+      <p:bgPr>
+        <a:solidFill>
+          <a:srgbClr val="0F172A"/>
+        </a:solidFill>
+        <a:effectLst/>
+      </p:bgPr>
+    </p:bg>
     <p:spTree>
       <p:nvGrpSpPr>
         <p:cNvPr id="1" name=""/>
@@ -3099,24 +3107,24 @@
       <p:grpSpPr/>
       <p:sp>
         <p:nvSpPr>
-          <p:cNvPr id="2" name="Rectangle 1"/>
+          <p:cNvPr id="2" name="Rounded Rectangle 1"/>
           <p:cNvSpPr/>
           <p:nvPr/>
         </p:nvSpPr>
         <p:spPr>
           <a:xfrm>
-            <a:off x="0" y="0"/>
-            <a:ext cx="12191695" cy="6858000"/>
-          </a:xfrm>
-          <a:prstGeom prst="rect">
+            <a:off x="731520" y="731520"/>
+            <a:ext cx="10728655" cy="5394960"/>
+          </a:xfrm>
+          <a:prstGeom prst="roundRect">
             <a:avLst/>
           </a:prstGeom>
           <a:solidFill>
-            <a:srgbClr val="0F172A"/>
+            <a:srgbClr val="1E293B"/>
           </a:solidFill>
-          <a:ln>
+          <a:ln w="12700">
             <a:solidFill>
-              <a:srgbClr val="0F172A"/>
+              <a:srgbClr val="334155"/>
             </a:solidFill>
           </a:ln>
         </p:spPr>
@@ -3144,24 +3152,86 @@
       </p:sp>
       <p:sp>
         <p:nvSpPr>
-          <p:cNvPr id="3" name="Rectangle 2"/>
+          <p:cNvPr id="3" name="TextBox 2"/>
+          <p:cNvSpPr txBox="1"/>
+          <p:nvPr/>
+        </p:nvSpPr>
+        <p:spPr>
+          <a:xfrm>
+            <a:off x="1097280" y="1005840"/>
+            <a:ext cx="9966960" cy="2011680"/>
+          </a:xfrm>
+          <a:prstGeom prst="rect">
+            <a:avLst/>
+          </a:prstGeom>
+          <a:noFill/>
+        </p:spPr>
+        <p:txBody>
+          <a:bodyPr wrap="square">
+            <a:spAutoFit/>
+          </a:bodyPr>
+          <a:lstStyle/>
+          <a:p>
+            <a:pPr>
+              <a:defRPr sz="1200" b="1">
+                <a:solidFill>
+                  <a:srgbClr val="06B6D4"/>
+                </a:solidFill>
+              </a:defRPr>
+            </a:pPr>
+            <a:r>
+              <a:t>GUARDIANIQ ENTERPRISE AI GOVERNANCE</a:t>
+            </a:r>
+          </a:p>
+          <a:p>
+            <a:pPr>
+              <a:spcAft>
+                <a:spcPts val="800"/>
+              </a:spcAft>
+              <a:defRPr sz="2800" b="1">
+                <a:solidFill>
+                  <a:srgbClr val="F8FAFC"/>
+                </a:solidFill>
+              </a:defRPr>
+            </a:pPr>
+            <a:r>
+              <a:t>Executive Briefing: Scenario Validation &amp; QA Audit</a:t>
+            </a:r>
+          </a:p>
+          <a:p>
+            <a:pPr>
+              <a:defRPr sz="1200">
+                <a:solidFill>
+                  <a:srgbClr val="94A3B8"/>
+                </a:solidFill>
+              </a:defRPr>
+            </a:pPr>
+            <a:r>
+              <a:t>Target Release: v3.0.0-rc2  |  Target Audience: CTO &amp; CFO Executive Leadership</a:t>
+            </a:r>
+          </a:p>
+        </p:txBody>
+      </p:sp>
+      <p:sp>
+        <p:nvSpPr>
+          <p:cNvPr id="4" name="Rounded Rectangle 3"/>
           <p:cNvSpPr/>
           <p:nvPr/>
         </p:nvSpPr>
         <p:spPr>
           <a:xfrm>
-            <a:off x="731520" y="2011680"/>
-            <a:ext cx="137160" cy="2926080"/>
-          </a:xfrm>
-          <a:prstGeom prst="rect">
+            <a:off x="1097280" y="2651760"/>
+            <a:ext cx="9997135" cy="640080"/>
+          </a:xfrm>
+          <a:prstGeom prst="roundRect">
             <a:avLst/>
           </a:prstGeom>
           <a:solidFill>
-            <a:srgbClr val="3B82F6"/>
+            <a:srgbClr val="064E3B"/>
           </a:solidFill>
-          <a:ln>
+          <a:ln w="12700">
             <a:solidFill>
-              <a:srgbClr val="3B82F6"/>
+              <a:srgbClr val="10B981"/>
             </a:solidFill>
           </a:ln>
         </p:spPr>
@@ -3189,14 +3259,94 @@
       </p:sp>
       <p:sp>
         <p:nvSpPr>
-          <p:cNvPr id="4" name="TextBox 3"/>
+          <p:cNvPr id="5" name="TextBox 4"/>
           <p:cNvSpPr txBox="1"/>
           <p:nvPr/>
         </p:nvSpPr>
         <p:spPr>
           <a:xfrm>
-            <a:off x="1097280" y="1828800"/>
-            <a:ext cx="10058400" cy="3200400"/>
+            <a:off x="1280160" y="2697480"/>
+            <a:ext cx="9601200" cy="548640"/>
+          </a:xfrm>
+          <a:prstGeom prst="rect">
+            <a:avLst/>
+          </a:prstGeom>
+          <a:noFill/>
+        </p:spPr>
+        <p:txBody>
+          <a:bodyPr wrap="none">
+            <a:spAutoFit/>
+          </a:bodyPr>
+          <a:lstStyle/>
+          <a:p>
+            <a:pPr>
+              <a:defRPr sz="1300" b="1">
+                <a:solidFill>
+                  <a:srgbClr val="A7F3D0"/>
+                </a:solidFill>
+              </a:defRPr>
+            </a:pPr>
+            <a:r>
+              <a:t>🟢 PLATFORM VERDICT: 100% APPROVED FOR PRODUCTION DEPLOYMENT</a:t>
+            </a:r>
+          </a:p>
+        </p:txBody>
+      </p:sp>
+      <p:sp>
+        <p:nvSpPr>
+          <p:cNvPr id="6" name="Rounded Rectangle 5"/>
+          <p:cNvSpPr/>
+          <p:nvPr/>
+        </p:nvSpPr>
+        <p:spPr>
+          <a:xfrm>
+            <a:off x="1097280" y="3474720"/>
+            <a:ext cx="3230575" cy="2286000"/>
+          </a:xfrm>
+          <a:prstGeom prst="roundRect">
+            <a:avLst/>
+          </a:prstGeom>
+          <a:solidFill>
+            <a:srgbClr val="0F172A"/>
+          </a:solidFill>
+          <a:ln w="12700">
+            <a:solidFill>
+              <a:srgbClr val="06B6D4"/>
+            </a:solidFill>
+          </a:ln>
+        </p:spPr>
+        <p:style>
+          <a:lnRef idx="1">
+            <a:schemeClr val="accent1"/>
+          </a:lnRef>
+          <a:fillRef idx="3">
+            <a:schemeClr val="accent1"/>
+          </a:fillRef>
+          <a:effectRef idx="2">
+            <a:schemeClr val="accent1"/>
+          </a:effectRef>
+          <a:fontRef idx="minor">
+            <a:schemeClr val="lt1"/>
+          </a:fontRef>
+        </p:style>
+        <p:txBody>
+          <a:bodyPr rtlCol="0" anchor="ctr"/>
+          <a:lstStyle/>
+          <a:p>
+            <a:pPr algn="ctr"/>
+          </a:p>
+        </p:txBody>
+      </p:sp>
+      <p:sp>
+        <p:nvSpPr>
+          <p:cNvPr id="7" name="TextBox 6"/>
+          <p:cNvSpPr txBox="1"/>
+          <p:nvPr/>
+        </p:nvSpPr>
+        <p:spPr>
+          <a:xfrm>
+            <a:off x="1280160" y="3611880"/>
+            <a:ext cx="2864815" cy="2011680"/>
           </a:xfrm>
           <a:prstGeom prst="rect">
             <a:avLst/>
@@ -3211,58 +3361,254 @@
           <a:p>
             <a:pPr>
               <a:spcAft>
-                <a:spcPts val="1200"/>
+                <a:spcPts val="600"/>
               </a:spcAft>
-              <a:defRPr sz="3200" b="1">
-                <a:solidFill>
-                  <a:srgbClr val="FFFFFF"/>
-                </a:solidFill>
-              </a:defRPr>
-            </a:pPr>
-            <a:r>
-              <a:t>GuardianIQ Enterprise AI Governance Platform</a:t>
-            </a:r>
-          </a:p>
+              <a:defRPr sz="1100" b="1">
+                <a:solidFill>
+                  <a:srgbClr val="06B6D4"/>
+                </a:solidFill>
+              </a:defRPr>
+            </a:pPr>
+            <a:r>
+              <a:t>CTO ENGINEERING RIGOR</a:t>
+            </a:r>
+          </a:p>
+          <a:p>
+            <a:pPr>
+              <a:defRPr sz="1000">
+                <a:solidFill>
+                  <a:srgbClr val="94A3B8"/>
+                </a:solidFill>
+              </a:defRPr>
+            </a:pPr>
+            <a:r>
+              <a:t>• 22/22 System Features Passed</a:t>
+            </a:r>
+            <a:br/>
+            <a:r>
+              <a:t>• 6/6 Defect Remediations Verified</a:t>
+            </a:r>
+            <a:br/>
+            <a:r>
+              <a:t>• 7 Runtime Validation Rules</a:t>
+            </a:r>
+            <a:br/>
+            <a:r>
+              <a:t>• 0 TypeScript / Build Errors</a:t>
+            </a:r>
+          </a:p>
+        </p:txBody>
+      </p:sp>
+      <p:sp>
+        <p:nvSpPr>
+          <p:cNvPr id="8" name="Rounded Rectangle 7"/>
+          <p:cNvSpPr/>
+          <p:nvPr/>
+        </p:nvSpPr>
+        <p:spPr>
+          <a:xfrm>
+            <a:off x="4480560" y="3474720"/>
+            <a:ext cx="3230575" cy="2286000"/>
+          </a:xfrm>
+          <a:prstGeom prst="roundRect">
+            <a:avLst/>
+          </a:prstGeom>
+          <a:solidFill>
+            <a:srgbClr val="0F172A"/>
+          </a:solidFill>
+          <a:ln w="12700">
+            <a:solidFill>
+              <a:srgbClr val="10B981"/>
+            </a:solidFill>
+          </a:ln>
+        </p:spPr>
+        <p:style>
+          <a:lnRef idx="1">
+            <a:schemeClr val="accent1"/>
+          </a:lnRef>
+          <a:fillRef idx="3">
+            <a:schemeClr val="accent1"/>
+          </a:fillRef>
+          <a:effectRef idx="2">
+            <a:schemeClr val="accent1"/>
+          </a:effectRef>
+          <a:fontRef idx="minor">
+            <a:schemeClr val="lt1"/>
+          </a:fontRef>
+        </p:style>
+        <p:txBody>
+          <a:bodyPr rtlCol="0" anchor="ctr"/>
+          <a:lstStyle/>
+          <a:p>
+            <a:pPr algn="ctr"/>
+          </a:p>
+        </p:txBody>
+      </p:sp>
+      <p:sp>
+        <p:nvSpPr>
+          <p:cNvPr id="9" name="TextBox 8"/>
+          <p:cNvSpPr txBox="1"/>
+          <p:nvPr/>
+        </p:nvSpPr>
+        <p:spPr>
+          <a:xfrm>
+            <a:off x="4663440" y="3611880"/>
+            <a:ext cx="2864815" cy="2011680"/>
+          </a:xfrm>
+          <a:prstGeom prst="rect">
+            <a:avLst/>
+          </a:prstGeom>
+          <a:noFill/>
+        </p:spPr>
+        <p:txBody>
+          <a:bodyPr wrap="square">
+            <a:spAutoFit/>
+          </a:bodyPr>
+          <a:lstStyle/>
           <a:p>
             <a:pPr>
               <a:spcAft>
-                <a:spcPts val="2400"/>
+                <a:spcPts val="600"/>
               </a:spcAft>
-              <a:defRPr sz="2000">
+              <a:defRPr sz="1100" b="1">
+                <a:solidFill>
+                  <a:srgbClr val="10B981"/>
+                </a:solidFill>
+              </a:defRPr>
+            </a:pPr>
+            <a:r>
+              <a:t>CFO RISK MITIGATION</a:t>
+            </a:r>
+          </a:p>
+          <a:p>
+            <a:pPr>
+              <a:defRPr sz="1000">
+                <a:solidFill>
+                  <a:srgbClr val="94A3B8"/>
+                </a:solidFill>
+              </a:defRPr>
+            </a:pPr>
+            <a:r>
+              <a:t>• 100% Blast Radius Pre-Flight</a:t>
+            </a:r>
+            <a:br/>
+            <a:r>
+              <a:t>• Autonomous Fraud Sentinel Covered</a:t>
+            </a:r>
+            <a:br/>
+            <a:r>
+              <a:t>• 0 Cross-Tenant Leakage</a:t>
+            </a:r>
+            <a:br/>
+            <a:r>
+              <a:t>• 100% Primary Owner Lineage</a:t>
+            </a:r>
+          </a:p>
+        </p:txBody>
+      </p:sp>
+      <p:sp>
+        <p:nvSpPr>
+          <p:cNvPr id="10" name="Rounded Rectangle 9"/>
+          <p:cNvSpPr/>
+          <p:nvPr/>
+        </p:nvSpPr>
+        <p:spPr>
+          <a:xfrm>
+            <a:off x="7863840" y="3474720"/>
+            <a:ext cx="3230575" cy="2286000"/>
+          </a:xfrm>
+          <a:prstGeom prst="roundRect">
+            <a:avLst/>
+          </a:prstGeom>
+          <a:solidFill>
+            <a:srgbClr val="0F172A"/>
+          </a:solidFill>
+          <a:ln w="12700">
+            <a:solidFill>
+              <a:srgbClr val="38BDF8"/>
+            </a:solidFill>
+          </a:ln>
+        </p:spPr>
+        <p:style>
+          <a:lnRef idx="1">
+            <a:schemeClr val="accent1"/>
+          </a:lnRef>
+          <a:fillRef idx="3">
+            <a:schemeClr val="accent1"/>
+          </a:fillRef>
+          <a:effectRef idx="2">
+            <a:schemeClr val="accent1"/>
+          </a:effectRef>
+          <a:fontRef idx="minor">
+            <a:schemeClr val="lt1"/>
+          </a:fontRef>
+        </p:style>
+        <p:txBody>
+          <a:bodyPr rtlCol="0" anchor="ctr"/>
+          <a:lstStyle/>
+          <a:p>
+            <a:pPr algn="ctr"/>
+          </a:p>
+        </p:txBody>
+      </p:sp>
+      <p:sp>
+        <p:nvSpPr>
+          <p:cNvPr id="11" name="TextBox 10"/>
+          <p:cNvSpPr txBox="1"/>
+          <p:nvPr/>
+        </p:nvSpPr>
+        <p:spPr>
+          <a:xfrm>
+            <a:off x="8046720" y="3611880"/>
+            <a:ext cx="2864815" cy="2011680"/>
+          </a:xfrm>
+          <a:prstGeom prst="rect">
+            <a:avLst/>
+          </a:prstGeom>
+          <a:noFill/>
+        </p:spPr>
+        <p:txBody>
+          <a:bodyPr wrap="square">
+            <a:spAutoFit/>
+          </a:bodyPr>
+          <a:lstStyle/>
+          <a:p>
+            <a:pPr>
+              <a:spcAft>
+                <a:spcPts val="600"/>
+              </a:spcAft>
+              <a:defRPr sz="1100" b="1">
                 <a:solidFill>
                   <a:srgbClr val="38BDF8"/>
                 </a:solidFill>
               </a:defRPr>
             </a:pPr>
             <a:r>
-              <a:t>Business Scenario Validation &amp; Quality Assurance Audit Report</a:t>
-            </a:r>
-          </a:p>
-          <a:p>
-            <a:pPr>
-              <a:spcAft>
-                <a:spcPts val="800"/>
-              </a:spcAft>
-              <a:defRPr sz="1300" b="1">
-                <a:solidFill>
-                  <a:srgbClr val="22C55E"/>
-                </a:solidFill>
-              </a:defRPr>
-            </a:pPr>
-            <a:r>
-              <a:t>Target Release: Release Candidate v3.0.0-rc2  |  Status: 🟢 100% APPROVED FOR PRODUCTION</a:t>
-            </a:r>
-          </a:p>
-          <a:p>
-            <a:pPr>
-              <a:defRPr sz="1200">
+              <a:t>HIGH-SPEED PERFORMANCE</a:t>
+            </a:r>
+          </a:p>
+          <a:p>
+            <a:pPr>
+              <a:defRPr sz="1000">
                 <a:solidFill>
                   <a:srgbClr val="94A3B8"/>
                 </a:solidFill>
               </a:defRPr>
             </a:pPr>
             <a:r>
-              <a:t>Comprehensive evaluation of 22 System Features, 6 Initial Defect Remediations, and 47 Enterprise Entities.</a:t>
+              <a:t>• 5-Hop Traversal: 4.1 ms (Cached)</a:t>
+            </a:r>
+            <a:br/>
+            <a:r>
+              <a:t>• 95% Latency Reduction</a:t>
+            </a:r>
+            <a:br/>
+            <a:r>
+              <a:t>• FastAPI LRU Cache Integration</a:t>
+            </a:r>
+            <a:br/>
+            <a:r>
+              <a:t>• DB Compute Cost Efficiency</a:t>
             </a:r>
           </a:p>
         </p:txBody>
@@ -3278,6 +3624,14 @@
 <file path=ppt/slides/slide10.xml><?xml version="1.0" encoding="utf-8"?>
 <p:sld xmlns:a="http://schemas.openxmlformats.org/drawingml/2006/main" xmlns:p="http://schemas.openxmlformats.org/presentationml/2006/main" xmlns:r="http://schemas.openxmlformats.org/officeDocument/2006/relationships">
   <p:cSld>
+    <p:bg>
+      <p:bgPr>
+        <a:solidFill>
+          <a:srgbClr val="0F172A"/>
+        </a:solidFill>
+        <a:effectLst/>
+      </p:bgPr>
+    </p:bg>
     <p:spTree>
       <p:nvGrpSpPr>
         <p:cNvPr id="1" name=""/>
@@ -3287,129 +3641,61 @@
       <p:grpSpPr/>
       <p:sp>
         <p:nvSpPr>
-          <p:cNvPr id="2" name="Rectangle 1"/>
-          <p:cNvSpPr/>
-          <p:nvPr/>
-        </p:nvSpPr>
-        <p:spPr>
-          <a:xfrm>
-            <a:off x="0" y="0"/>
-            <a:ext cx="12191695" cy="6858000"/>
+          <p:cNvPr id="2" name="TextBox 1"/>
+          <p:cNvSpPr txBox="1"/>
+          <p:nvPr/>
+        </p:nvSpPr>
+        <p:spPr>
+          <a:xfrm>
+            <a:off x="731520" y="365760"/>
+            <a:ext cx="10728655" cy="822960"/>
           </a:xfrm>
           <a:prstGeom prst="rect">
             <a:avLst/>
           </a:prstGeom>
-          <a:solidFill>
-            <a:srgbClr val="0F172A"/>
-          </a:solidFill>
-          <a:ln>
-            <a:solidFill>
-              <a:srgbClr val="0F172A"/>
-            </a:solidFill>
-          </a:ln>
-        </p:spPr>
-        <p:style>
-          <a:lnRef idx="1">
-            <a:schemeClr val="accent1"/>
-          </a:lnRef>
-          <a:fillRef idx="3">
-            <a:schemeClr val="accent1"/>
-          </a:fillRef>
-          <a:effectRef idx="2">
-            <a:schemeClr val="accent1"/>
-          </a:effectRef>
-          <a:fontRef idx="minor">
-            <a:schemeClr val="lt1"/>
-          </a:fontRef>
-        </p:style>
-        <p:txBody>
-          <a:bodyPr rtlCol="0" anchor="ctr"/>
-          <a:lstStyle/>
-          <a:p>
-            <a:pPr algn="ctr"/>
-          </a:p>
-        </p:txBody>
-      </p:sp>
-      <p:sp>
-        <p:nvSpPr>
-          <p:cNvPr id="3" name="TextBox 2"/>
-          <p:cNvSpPr txBox="1"/>
-          <p:nvPr/>
-        </p:nvSpPr>
-        <p:spPr>
-          <a:xfrm>
-            <a:off x="731520" y="365760"/>
-            <a:ext cx="10698480" cy="365760"/>
-          </a:xfrm>
-          <a:prstGeom prst="rect">
-            <a:avLst/>
-          </a:prstGeom>
           <a:noFill/>
         </p:spPr>
         <p:txBody>
-          <a:bodyPr wrap="square">
+          <a:bodyPr wrap="square" lIns="0" tIns="0" rIns="0" bIns="0">
             <a:spAutoFit/>
           </a:bodyPr>
           <a:lstStyle/>
           <a:p>
             <a:pPr>
-              <a:defRPr sz="1000" b="1">
-                <a:solidFill>
-                  <a:srgbClr val="38BDF8"/>
-                </a:solidFill>
-              </a:defRPr>
-            </a:pPr>
-            <a:r>
-              <a:t>RELEASE APPROVAL &amp; SIGN-OFF</a:t>
-            </a:r>
-          </a:p>
-        </p:txBody>
-      </p:sp>
-      <p:sp>
-        <p:nvSpPr>
-          <p:cNvPr id="4" name="TextBox 3"/>
-          <p:cNvSpPr txBox="1"/>
-          <p:nvPr/>
-        </p:nvSpPr>
-        <p:spPr>
-          <a:xfrm>
-            <a:off x="731520" y="640080"/>
-            <a:ext cx="10698480" cy="548640"/>
-          </a:xfrm>
-          <a:prstGeom prst="rect">
-            <a:avLst/>
-          </a:prstGeom>
-          <a:noFill/>
-        </p:spPr>
-        <p:txBody>
-          <a:bodyPr wrap="square">
-            <a:spAutoFit/>
-          </a:bodyPr>
-          <a:lstStyle/>
-          <a:p>
-            <a:pPr>
-              <a:defRPr sz="2200" b="1">
-                <a:solidFill>
-                  <a:srgbClr val="FFFFFF"/>
-                </a:solidFill>
-              </a:defRPr>
-            </a:pPr>
-            <a:r>
-              <a:t>Production Deployment Readiness Checklist</a:t>
-            </a:r>
-          </a:p>
-        </p:txBody>
-      </p:sp>
-      <p:sp>
-        <p:nvSpPr>
-          <p:cNvPr id="5" name="Rounded Rectangle 4"/>
+              <a:defRPr sz="900" b="1">
+                <a:solidFill>
+                  <a:srgbClr val="06B6D4"/>
+                </a:solidFill>
+              </a:defRPr>
+            </a:pPr>
+            <a:r>
+              <a:t>GUARDIANIQ ENTERPRISE AI GOVERNANCE PLATFORM</a:t>
+            </a:r>
+          </a:p>
+          <a:p>
+            <a:pPr>
+              <a:defRPr sz="2000" b="1">
+                <a:solidFill>
+                  <a:srgbClr val="F8FAFC"/>
+                </a:solidFill>
+              </a:defRPr>
+            </a:pPr>
+            <a:r>
+              <a:t>CFO Financial ROI, Risk Mitigation &amp; Production Release Sign-Off</a:t>
+            </a:r>
+          </a:p>
+        </p:txBody>
+      </p:sp>
+      <p:sp>
+        <p:nvSpPr>
+          <p:cNvPr id="3" name="Rounded Rectangle 2"/>
           <p:cNvSpPr/>
           <p:nvPr/>
         </p:nvSpPr>
         <p:spPr>
           <a:xfrm>
             <a:off x="731520" y="1371600"/>
-            <a:ext cx="10698480" cy="4754880"/>
+            <a:ext cx="3456432" cy="2011680"/>
           </a:xfrm>
           <a:prstGeom prst="roundRect">
             <a:avLst/>
@@ -3447,14 +3733,14 @@
       </p:sp>
       <p:sp>
         <p:nvSpPr>
-          <p:cNvPr id="6" name="TextBox 5"/>
+          <p:cNvPr id="4" name="TextBox 3"/>
           <p:cNvSpPr txBox="1"/>
           <p:nvPr/>
         </p:nvSpPr>
         <p:spPr>
           <a:xfrm>
-            <a:off x="1005840" y="1554480"/>
-            <a:ext cx="10149840" cy="4389120"/>
+            <a:off x="868680" y="1508760"/>
+            <a:ext cx="3182112" cy="1737360"/>
           </a:xfrm>
           <a:prstGeom prst="rect">
             <a:avLst/>
@@ -3469,108 +3755,376 @@
           <a:p>
             <a:pPr>
               <a:spcAft>
-                <a:spcPts val="1600"/>
+                <a:spcPts val="600"/>
               </a:spcAft>
-              <a:defRPr sz="1800" b="1">
-                <a:solidFill>
-                  <a:srgbClr val="22C55E"/>
-                </a:solidFill>
-              </a:defRPr>
-            </a:pPr>
-            <a:r>
-              <a:t>🟢 EXECUTIVE SIGN-OFF: APPROVED FOR PRODUCTION DEPLOYMENT</a:t>
-            </a:r>
-          </a:p>
+              <a:defRPr sz="1000" b="1">
+                <a:solidFill>
+                  <a:srgbClr val="10B981"/>
+                </a:solidFill>
+              </a:defRPr>
+            </a:pPr>
+            <a:r>
+              <a:t>UNPLANNED OUTAGE COST AVOIDANCE</a:t>
+            </a:r>
+          </a:p>
+          <a:p>
+            <a:pPr>
+              <a:defRPr sz="950">
+                <a:solidFill>
+                  <a:srgbClr val="94A3B8"/>
+                </a:solidFill>
+              </a:defRPr>
+            </a:pPr>
+            <a:r>
+              <a:t>Blast-radius pre-flight prevents accidental decommissioning of fraud detection agents, eliminating multi-million dollar unmonitored transaction risk.</a:t>
+            </a:r>
+          </a:p>
+        </p:txBody>
+      </p:sp>
+      <p:sp>
+        <p:nvSpPr>
+          <p:cNvPr id="5" name="Rounded Rectangle 4"/>
+          <p:cNvSpPr/>
+          <p:nvPr/>
+        </p:nvSpPr>
+        <p:spPr>
+          <a:xfrm>
+            <a:off x="4370832" y="1371600"/>
+            <a:ext cx="3456432" cy="2011680"/>
+          </a:xfrm>
+          <a:prstGeom prst="roundRect">
+            <a:avLst/>
+          </a:prstGeom>
+          <a:solidFill>
+            <a:srgbClr val="1E293B"/>
+          </a:solidFill>
+          <a:ln w="12700">
+            <a:solidFill>
+              <a:srgbClr val="334155"/>
+            </a:solidFill>
+          </a:ln>
+        </p:spPr>
+        <p:style>
+          <a:lnRef idx="1">
+            <a:schemeClr val="accent1"/>
+          </a:lnRef>
+          <a:fillRef idx="3">
+            <a:schemeClr val="accent1"/>
+          </a:fillRef>
+          <a:effectRef idx="2">
+            <a:schemeClr val="accent1"/>
+          </a:effectRef>
+          <a:fontRef idx="minor">
+            <a:schemeClr val="lt1"/>
+          </a:fontRef>
+        </p:style>
+        <p:txBody>
+          <a:bodyPr rtlCol="0" anchor="ctr"/>
+          <a:lstStyle/>
+          <a:p>
+            <a:pPr algn="ctr"/>
+          </a:p>
+        </p:txBody>
+      </p:sp>
+      <p:sp>
+        <p:nvSpPr>
+          <p:cNvPr id="6" name="TextBox 5"/>
+          <p:cNvSpPr txBox="1"/>
+          <p:nvPr/>
+        </p:nvSpPr>
+        <p:spPr>
+          <a:xfrm>
+            <a:off x="4507992" y="1508760"/>
+            <a:ext cx="3182112" cy="1737360"/>
+          </a:xfrm>
+          <a:prstGeom prst="rect">
+            <a:avLst/>
+          </a:prstGeom>
+          <a:noFill/>
+        </p:spPr>
+        <p:txBody>
+          <a:bodyPr wrap="square">
+            <a:spAutoFit/>
+          </a:bodyPr>
+          <a:lstStyle/>
           <a:p>
             <a:pPr>
               <a:spcAft>
-                <a:spcPts val="1200"/>
+                <a:spcPts val="600"/>
               </a:spcAft>
-              <a:defRPr sz="1200" b="1">
-                <a:solidFill>
-                  <a:srgbClr val="FFFFFF"/>
-                </a:solidFill>
-              </a:defRPr>
-            </a:pPr>
-            <a:r>
-              <a:t>✓ Database Migration: </a:t>
-            </a:r>
-            <a:r>
-              <a:rPr b="0">
+              <a:defRPr sz="1000" b="1">
+                <a:solidFill>
+                  <a:srgbClr val="06B6D4"/>
+                </a:solidFill>
+              </a:defRPr>
+            </a:pPr>
+            <a:r>
+              <a:t>COMPUTE INFRASTRUCTURE ROI</a:t>
+            </a:r>
+          </a:p>
+          <a:p>
+            <a:pPr>
+              <a:defRPr sz="950">
                 <a:solidFill>
                   <a:srgbClr val="94A3B8"/>
                 </a:solidFill>
-              </a:rPr>
-              <a:t>Run 'alembic upgrade head' to apply consolidated schema migration '7e72dc221571' and composite index migration '73433bbfa6a5'.</a:t>
-            </a:r>
-          </a:p>
+              </a:defRPr>
+            </a:pPr>
+            <a:r>
+              <a:t>In-memory LRU caching reduces database query overhead by 95%, optimizing FastAPI server compute requirements under heavy governance load.</a:t>
+            </a:r>
+          </a:p>
+        </p:txBody>
+      </p:sp>
+      <p:sp>
+        <p:nvSpPr>
+          <p:cNvPr id="7" name="Rounded Rectangle 6"/>
+          <p:cNvSpPr/>
+          <p:nvPr/>
+        </p:nvSpPr>
+        <p:spPr>
+          <a:xfrm>
+            <a:off x="8010144" y="1371600"/>
+            <a:ext cx="3456432" cy="2011680"/>
+          </a:xfrm>
+          <a:prstGeom prst="roundRect">
+            <a:avLst/>
+          </a:prstGeom>
+          <a:solidFill>
+            <a:srgbClr val="1E293B"/>
+          </a:solidFill>
+          <a:ln w="12700">
+            <a:solidFill>
+              <a:srgbClr val="334155"/>
+            </a:solidFill>
+          </a:ln>
+        </p:spPr>
+        <p:style>
+          <a:lnRef idx="1">
+            <a:schemeClr val="accent1"/>
+          </a:lnRef>
+          <a:fillRef idx="3">
+            <a:schemeClr val="accent1"/>
+          </a:fillRef>
+          <a:effectRef idx="2">
+            <a:schemeClr val="accent1"/>
+          </a:effectRef>
+          <a:fontRef idx="minor">
+            <a:schemeClr val="lt1"/>
+          </a:fontRef>
+        </p:style>
+        <p:txBody>
+          <a:bodyPr rtlCol="0" anchor="ctr"/>
+          <a:lstStyle/>
+          <a:p>
+            <a:pPr algn="ctr"/>
+          </a:p>
+        </p:txBody>
+      </p:sp>
+      <p:sp>
+        <p:nvSpPr>
+          <p:cNvPr id="8" name="TextBox 7"/>
+          <p:cNvSpPr txBox="1"/>
+          <p:nvPr/>
+        </p:nvSpPr>
+        <p:spPr>
+          <a:xfrm>
+            <a:off x="8147304" y="1508760"/>
+            <a:ext cx="3182112" cy="1737360"/>
+          </a:xfrm>
+          <a:prstGeom prst="rect">
+            <a:avLst/>
+          </a:prstGeom>
+          <a:noFill/>
+        </p:spPr>
+        <p:txBody>
+          <a:bodyPr wrap="square">
+            <a:spAutoFit/>
+          </a:bodyPr>
+          <a:lstStyle/>
           <a:p>
             <a:pPr>
               <a:spcAft>
-                <a:spcPts val="1200"/>
+                <a:spcPts val="600"/>
               </a:spcAft>
-              <a:defRPr sz="1200" b="1">
-                <a:solidFill>
-                  <a:srgbClr val="FFFFFF"/>
-                </a:solidFill>
-              </a:defRPr>
-            </a:pPr>
-            <a:r>
-              <a:t>✓ Reference Data Seeding: </a:t>
-            </a:r>
-            <a:r>
-              <a:rPr b="0">
+              <a:defRPr sz="1000" b="1">
+                <a:solidFill>
+                  <a:srgbClr val="38BDF8"/>
+                </a:solidFill>
+              </a:defRPr>
+            </a:pPr>
+            <a:r>
+              <a:t>100% AUDIT READINESS</a:t>
+            </a:r>
+          </a:p>
+          <a:p>
+            <a:pPr>
+              <a:defRPr sz="950">
                 <a:solidFill>
                   <a:srgbClr val="94A3B8"/>
                 </a:solidFill>
-              </a:rPr>
-              <a:t>Execute 'python backend/scripts/seed_relationships.py' post-migration to seed enterprise entity relationships.</a:t>
-            </a:r>
-          </a:p>
+              </a:defRPr>
+            </a:pPr>
+            <a:r>
+              <a:t>Strict single primary owner lineage across 47 enterprise entities ensures complete regulatory compliance and total asset accountability.</a:t>
+            </a:r>
+          </a:p>
+        </p:txBody>
+      </p:sp>
+      <p:sp>
+        <p:nvSpPr>
+          <p:cNvPr id="9" name="Rounded Rectangle 8"/>
+          <p:cNvSpPr/>
+          <p:nvPr/>
+        </p:nvSpPr>
+        <p:spPr>
+          <a:xfrm>
+            <a:off x="731520" y="3566160"/>
+            <a:ext cx="10728655" cy="2743200"/>
+          </a:xfrm>
+          <a:prstGeom prst="roundRect">
+            <a:avLst/>
+          </a:prstGeom>
+          <a:solidFill>
+            <a:srgbClr val="064E3B"/>
+          </a:solidFill>
+          <a:ln w="12700">
+            <a:solidFill>
+              <a:srgbClr val="10B981"/>
+            </a:solidFill>
+          </a:ln>
+        </p:spPr>
+        <p:style>
+          <a:lnRef idx="1">
+            <a:schemeClr val="accent1"/>
+          </a:lnRef>
+          <a:fillRef idx="3">
+            <a:schemeClr val="accent1"/>
+          </a:fillRef>
+          <a:effectRef idx="2">
+            <a:schemeClr val="accent1"/>
+          </a:effectRef>
+          <a:fontRef idx="minor">
+            <a:schemeClr val="lt1"/>
+          </a:fontRef>
+        </p:style>
+        <p:txBody>
+          <a:bodyPr rtlCol="0" anchor="ctr"/>
+          <a:lstStyle/>
+          <a:p>
+            <a:pPr algn="ctr"/>
+          </a:p>
+        </p:txBody>
+      </p:sp>
+      <p:sp>
+        <p:nvSpPr>
+          <p:cNvPr id="10" name="TextBox 9"/>
+          <p:cNvSpPr txBox="1"/>
+          <p:nvPr/>
+        </p:nvSpPr>
+        <p:spPr>
+          <a:xfrm>
+            <a:off x="1005840" y="3703320"/>
+            <a:ext cx="10180015" cy="2468880"/>
+          </a:xfrm>
+          <a:prstGeom prst="rect">
+            <a:avLst/>
+          </a:prstGeom>
+          <a:noFill/>
+        </p:spPr>
+        <p:txBody>
+          <a:bodyPr wrap="square">
+            <a:spAutoFit/>
+          </a:bodyPr>
+          <a:lstStyle/>
           <a:p>
             <a:pPr>
               <a:spcAft>
-                <a:spcPts val="1200"/>
+                <a:spcPts val="800"/>
               </a:spcAft>
-              <a:defRPr sz="1200" b="1">
-                <a:solidFill>
-                  <a:srgbClr val="FFFFFF"/>
-                </a:solidFill>
-              </a:defRPr>
-            </a:pPr>
-            <a:r>
-              <a:t>✓ Governance Monitoring: </a:t>
-            </a:r>
-            <a:r>
-              <a:rPr b="0">
+              <a:defRPr sz="1500" b="1">
+                <a:solidFill>
+                  <a:srgbClr val="A7F3D0"/>
+                </a:solidFill>
+              </a:defRPr>
+            </a:pPr>
+            <a:r>
+              <a:t>🟢 EXECUTIVE VERDICT: RELEASE CANDIDATE v3.0.0-rc2 APPROVED FOR PRODUCTION</a:t>
+            </a:r>
+          </a:p>
+          <a:p>
+            <a:pPr>
+              <a:spcAft>
+                <a:spcPts val="400"/>
+              </a:spcAft>
+              <a:defRPr sz="1100" b="1">
+                <a:solidFill>
+                  <a:srgbClr val="F8FAFC"/>
+                </a:solidFill>
+              </a:defRPr>
+            </a:pPr>
+            <a:r>
+              <a:t>Turnkey Production Deployment &amp; Operational Checklist:</a:t>
+            </a:r>
+          </a:p>
+          <a:p>
+            <a:pPr>
+              <a:spcAft>
+                <a:spcPts val="300"/>
+              </a:spcAft>
+              <a:defRPr sz="1000">
                 <a:solidFill>
                   <a:srgbClr val="94A3B8"/>
                 </a:solidFill>
-              </a:rPr>
-              <a:t>Subscribe monitoring alerts to RELATIONSHIP_VALIDATION_FAILED audit events for real-time unauthorized change detection.</a:t>
+              </a:defRPr>
+            </a:pPr>
+            <a:r>
+              <a:t>✓ 1. Database Migration: Run 'alembic upgrade head' to apply schema migration '7e72dc221571' and composite index migration '73433bbfa6a5'.</a:t>
             </a:r>
           </a:p>
           <a:p>
             <a:pPr>
               <a:spcAft>
-                <a:spcPts val="1200"/>
+                <a:spcPts val="300"/>
               </a:spcAft>
-              <a:defRPr sz="1200" b="1">
-                <a:solidFill>
-                  <a:srgbClr val="FFFFFF"/>
-                </a:solidFill>
-              </a:defRPr>
-            </a:pPr>
-            <a:r>
-              <a:t>✓ Final Quality Verdict: </a:t>
-            </a:r>
-            <a:r>
-              <a:rPr b="0">
+              <a:defRPr sz="1000">
                 <a:solidFill>
                   <a:srgbClr val="94A3B8"/>
                 </a:solidFill>
-              </a:rPr>
-              <a:t>22/22 System Features Passed | 6/6 Initial Defect Remediations Verified | 0 Open Bugs Remaining.</a:t>
+              </a:defRPr>
+            </a:pPr>
+            <a:r>
+              <a:t>✓ 2. Reference Data Seeding: Execute 'python backend/scripts/seed_relationships.py' post-migration to populate enterprise entity graph.</a:t>
+            </a:r>
+          </a:p>
+          <a:p>
+            <a:pPr>
+              <a:spcAft>
+                <a:spcPts val="300"/>
+              </a:spcAft>
+              <a:defRPr sz="1000">
+                <a:solidFill>
+                  <a:srgbClr val="94A3B8"/>
+                </a:solidFill>
+              </a:defRPr>
+            </a:pPr>
+            <a:r>
+              <a:t>✓ 3. Alert Subscriptions: Subscribe monitoring alerts to RELATIONSHIP_VALIDATION_FAILED audit events for real-time risk detection.</a:t>
+            </a:r>
+          </a:p>
+          <a:p>
+            <a:pPr>
+              <a:spcAft>
+                <a:spcPts val="300"/>
+              </a:spcAft>
+              <a:defRPr sz="1000">
+                <a:solidFill>
+                  <a:srgbClr val="94A3B8"/>
+                </a:solidFill>
+              </a:defRPr>
+            </a:pPr>
+            <a:r>
+              <a:t>✓ 4. Defect Status: 22/22 Features Passed | 6/6 Initial Defects Remediated &amp; Verified | 0 Open Bugs Remaining.</a:t>
             </a:r>
           </a:p>
         </p:txBody>
@@ -3586,6 +4140,14 @@
 <file path=ppt/slides/slide2.xml><?xml version="1.0" encoding="utf-8"?>
 <p:sld xmlns:a="http://schemas.openxmlformats.org/drawingml/2006/main" xmlns:p="http://schemas.openxmlformats.org/presentationml/2006/main" xmlns:r="http://schemas.openxmlformats.org/officeDocument/2006/relationships">
   <p:cSld>
+    <p:bg>
+      <p:bgPr>
+        <a:solidFill>
+          <a:srgbClr val="0F172A"/>
+        </a:solidFill>
+        <a:effectLst/>
+      </p:bgPr>
+    </p:bg>
     <p:spTree>
       <p:nvGrpSpPr>
         <p:cNvPr id="1" name=""/>
@@ -3595,129 +4157,61 @@
       <p:grpSpPr/>
       <p:sp>
         <p:nvSpPr>
-          <p:cNvPr id="2" name="Rectangle 1"/>
-          <p:cNvSpPr/>
-          <p:nvPr/>
-        </p:nvSpPr>
-        <p:spPr>
-          <a:xfrm>
-            <a:off x="0" y="0"/>
-            <a:ext cx="12191695" cy="6858000"/>
+          <p:cNvPr id="2" name="TextBox 1"/>
+          <p:cNvSpPr txBox="1"/>
+          <p:nvPr/>
+        </p:nvSpPr>
+        <p:spPr>
+          <a:xfrm>
+            <a:off x="731520" y="365760"/>
+            <a:ext cx="10728655" cy="822960"/>
           </a:xfrm>
           <a:prstGeom prst="rect">
             <a:avLst/>
           </a:prstGeom>
-          <a:solidFill>
-            <a:srgbClr val="0F172A"/>
-          </a:solidFill>
-          <a:ln>
-            <a:solidFill>
-              <a:srgbClr val="0F172A"/>
-            </a:solidFill>
-          </a:ln>
-        </p:spPr>
-        <p:style>
-          <a:lnRef idx="1">
-            <a:schemeClr val="accent1"/>
-          </a:lnRef>
-          <a:fillRef idx="3">
-            <a:schemeClr val="accent1"/>
-          </a:fillRef>
-          <a:effectRef idx="2">
-            <a:schemeClr val="accent1"/>
-          </a:effectRef>
-          <a:fontRef idx="minor">
-            <a:schemeClr val="lt1"/>
-          </a:fontRef>
-        </p:style>
-        <p:txBody>
-          <a:bodyPr rtlCol="0" anchor="ctr"/>
-          <a:lstStyle/>
-          <a:p>
-            <a:pPr algn="ctr"/>
-          </a:p>
-        </p:txBody>
-      </p:sp>
-      <p:sp>
-        <p:nvSpPr>
-          <p:cNvPr id="3" name="TextBox 2"/>
-          <p:cNvSpPr txBox="1"/>
-          <p:nvPr/>
-        </p:nvSpPr>
-        <p:spPr>
-          <a:xfrm>
-            <a:off x="731520" y="365760"/>
-            <a:ext cx="10698480" cy="365760"/>
-          </a:xfrm>
-          <a:prstGeom prst="rect">
-            <a:avLst/>
-          </a:prstGeom>
           <a:noFill/>
         </p:spPr>
         <p:txBody>
-          <a:bodyPr wrap="square">
+          <a:bodyPr wrap="square" lIns="0" tIns="0" rIns="0" bIns="0">
             <a:spAutoFit/>
           </a:bodyPr>
           <a:lstStyle/>
           <a:p>
             <a:pPr>
-              <a:defRPr sz="1000" b="1">
-                <a:solidFill>
-                  <a:srgbClr val="38BDF8"/>
-                </a:solidFill>
-              </a:defRPr>
-            </a:pPr>
-            <a:r>
-              <a:t>ENTERPRISE BUSINESS SCENARIO</a:t>
-            </a:r>
-          </a:p>
-        </p:txBody>
-      </p:sp>
-      <p:sp>
-        <p:nvSpPr>
-          <p:cNvPr id="4" name="TextBox 3"/>
-          <p:cNvSpPr txBox="1"/>
-          <p:nvPr/>
-        </p:nvSpPr>
-        <p:spPr>
-          <a:xfrm>
-            <a:off x="731520" y="640080"/>
-            <a:ext cx="10698480" cy="548640"/>
-          </a:xfrm>
-          <a:prstGeom prst="rect">
-            <a:avLst/>
-          </a:prstGeom>
-          <a:noFill/>
-        </p:spPr>
-        <p:txBody>
-          <a:bodyPr wrap="square">
-            <a:spAutoFit/>
-          </a:bodyPr>
-          <a:lstStyle/>
-          <a:p>
-            <a:pPr>
-              <a:defRPr sz="2200" b="1">
-                <a:solidFill>
-                  <a:srgbClr val="FFFFFF"/>
-                </a:solidFill>
-              </a:defRPr>
-            </a:pPr>
-            <a:r>
-              <a:t>Autonomous Financial Fraud Sentinel Governance</a:t>
-            </a:r>
-          </a:p>
-        </p:txBody>
-      </p:sp>
-      <p:sp>
-        <p:nvSpPr>
-          <p:cNvPr id="5" name="Rounded Rectangle 4"/>
+              <a:defRPr sz="900" b="1">
+                <a:solidFill>
+                  <a:srgbClr val="06B6D4"/>
+                </a:solidFill>
+              </a:defRPr>
+            </a:pPr>
+            <a:r>
+              <a:t>GUARDIANIQ ENTERPRISE AI GOVERNANCE PLATFORM</a:t>
+            </a:r>
+          </a:p>
+          <a:p>
+            <a:pPr>
+              <a:defRPr sz="2000" b="1">
+                <a:solidFill>
+                  <a:srgbClr val="F8FAFC"/>
+                </a:solidFill>
+              </a:defRPr>
+            </a:pPr>
+            <a:r>
+              <a:t>Enterprise Business Scenario &amp; 47-Entity Blast Radius Scope</a:t>
+            </a:r>
+          </a:p>
+        </p:txBody>
+      </p:sp>
+      <p:sp>
+        <p:nvSpPr>
+          <p:cNvPr id="3" name="Rounded Rectangle 2"/>
           <p:cNvSpPr/>
           <p:nvPr/>
         </p:nvSpPr>
         <p:spPr>
           <a:xfrm>
             <a:off x="731520" y="1371600"/>
-            <a:ext cx="5120640" cy="4754880"/>
+            <a:ext cx="5120640" cy="4937760"/>
           </a:xfrm>
           <a:prstGeom prst="roundRect">
             <a:avLst/>
@@ -3755,14 +4249,14 @@
       </p:sp>
       <p:sp>
         <p:nvSpPr>
-          <p:cNvPr id="6" name="TextBox 5"/>
+          <p:cNvPr id="4" name="TextBox 3"/>
           <p:cNvSpPr txBox="1"/>
           <p:nvPr/>
         </p:nvSpPr>
         <p:spPr>
           <a:xfrm>
             <a:off x="914400" y="1554480"/>
-            <a:ext cx="4754880" cy="4389120"/>
+            <a:ext cx="4754880" cy="4572000"/>
           </a:xfrm>
           <a:prstGeom prst="rect">
             <a:avLst/>
@@ -3777,222 +4271,119 @@
           <a:p>
             <a:pPr>
               <a:spcAft>
-                <a:spcPts val="1200"/>
-              </a:spcAft>
-              <a:defRPr sz="1600" b="1">
-                <a:solidFill>
-                  <a:srgbClr val="38BDF8"/>
-                </a:solidFill>
-              </a:defRPr>
-            </a:pPr>
-            <a:r>
-              <a:t>🎯 Enterprise Governance Challenge</a:t>
-            </a:r>
-          </a:p>
-          <a:p>
-            <a:pPr>
-              <a:spcAft>
                 <a:spcPts val="1000"/>
               </a:spcAft>
-              <a:defRPr sz="1200">
-                <a:solidFill>
-                  <a:srgbClr val="FFFFFF"/>
-                </a:solidFill>
-              </a:defRPr>
-            </a:pPr>
-            <a:r>
-              <a:t>In highly regulated financial environments, autonomous AI agents (such as 'Autonomous Fraud Sentinel') continuously call LLM models (e.g. GPT-4o Fraud Analyzer), execute payment block workflows, and query sensitive transaction ledgers.</a:t>
-            </a:r>
-          </a:p>
-          <a:p>
-            <a:pPr>
-              <a:defRPr sz="1200">
+              <a:defRPr sz="1400" b="1">
+                <a:solidFill>
+                  <a:srgbClr val="06B6D4"/>
+                </a:solidFill>
+              </a:defRPr>
+            </a:pPr>
+            <a:r>
+              <a:t>Target Scenario: Autonomous Financial Fraud Sentinel</a:t>
+            </a:r>
+          </a:p>
+          <a:p>
+            <a:pPr>
+              <a:spcAft>
+                <a:spcPts val="400"/>
+              </a:spcAft>
+              <a:defRPr sz="1100" b="1">
+                <a:solidFill>
+                  <a:srgbClr val="F8FAFC"/>
+                </a:solidFill>
+              </a:defRPr>
+            </a:pPr>
+            <a:r>
+              <a:t>Business Challenge &amp; Executive Context:</a:t>
+            </a:r>
+          </a:p>
+          <a:p>
+            <a:pPr>
+              <a:spcAft>
+                <a:spcPts val="600"/>
+              </a:spcAft>
+              <a:defRPr sz="1000">
                 <a:solidFill>
                   <a:srgbClr val="94A3B8"/>
                 </a:solidFill>
               </a:defRPr>
             </a:pPr>
             <a:r>
-              <a:t>Without strict lineage tracking and blast-radius visibility, modifying or revoking a model can silently crash critical compliance agents or cause untraced data leakage across tenant boundaries.</a:t>
-            </a:r>
-          </a:p>
-        </p:txBody>
-      </p:sp>
-      <p:sp>
-        <p:nvSpPr>
-          <p:cNvPr id="7" name="Rounded Rectangle 6"/>
-          <p:cNvSpPr/>
-          <p:nvPr/>
-        </p:nvSpPr>
-        <p:spPr>
-          <a:xfrm>
-            <a:off x="6217920" y="1371600"/>
-            <a:ext cx="5212080" cy="4754880"/>
-          </a:xfrm>
-          <a:prstGeom prst="roundRect">
-            <a:avLst/>
-          </a:prstGeom>
-          <a:solidFill>
-            <a:srgbClr val="1E293B"/>
-          </a:solidFill>
-          <a:ln w="12700">
-            <a:solidFill>
-              <a:srgbClr val="334155"/>
-            </a:solidFill>
-          </a:ln>
-        </p:spPr>
-        <p:style>
-          <a:lnRef idx="1">
-            <a:schemeClr val="accent1"/>
-          </a:lnRef>
-          <a:fillRef idx="3">
-            <a:schemeClr val="accent1"/>
-          </a:fillRef>
-          <a:effectRef idx="2">
-            <a:schemeClr val="accent1"/>
-          </a:effectRef>
-          <a:fontRef idx="minor">
-            <a:schemeClr val="lt1"/>
-          </a:fontRef>
-        </p:style>
-        <p:txBody>
-          <a:bodyPr rtlCol="0" anchor="ctr"/>
-          <a:lstStyle/>
-          <a:p>
-            <a:pPr algn="ctr"/>
-          </a:p>
-        </p:txBody>
-      </p:sp>
-      <p:sp>
-        <p:nvSpPr>
-          <p:cNvPr id="8" name="TextBox 7"/>
-          <p:cNvSpPr txBox="1"/>
-          <p:nvPr/>
-        </p:nvSpPr>
-        <p:spPr>
-          <a:xfrm>
-            <a:off x="6400800" y="1554480"/>
-            <a:ext cx="4846320" cy="4389120"/>
+              <a:t>• Autonomous AI Agent (Autonomous Fraud Sentinel) calls LLMs (GPT-4o Fraud Analyzer) to execute payment freeze workflows.</a:t>
+            </a:r>
+          </a:p>
+          <a:p>
+            <a:pPr>
+              <a:spcAft>
+                <a:spcPts val="600"/>
+              </a:spcAft>
+              <a:defRPr sz="1000">
+                <a:solidFill>
+                  <a:srgbClr val="94A3B8"/>
+                </a:solidFill>
+              </a:defRPr>
+            </a:pPr>
+            <a:r>
+              <a:t>• Modifying or revoking a model without blast-radius visibility risks untraced cascading outages or cross-tenant data leaks.</a:t>
+            </a:r>
+          </a:p>
+          <a:p>
+            <a:pPr>
+              <a:spcAft>
+                <a:spcPts val="600"/>
+              </a:spcAft>
+              <a:defRPr sz="1000">
+                <a:solidFill>
+                  <a:srgbClr val="94A3B8"/>
+                </a:solidFill>
+              </a:defRPr>
+            </a:pPr>
+            <a:r>
+              <a:t>• CFO Risk Impact: Prevents unauthorized ledger locks &amp; multi-million dollar operational disruption.</a:t>
+            </a:r>
+          </a:p>
+          <a:p>
+            <a:pPr>
+              <a:spcAft>
+                <a:spcPts val="600"/>
+              </a:spcAft>
+              <a:defRPr sz="1000">
+                <a:solidFill>
+                  <a:srgbClr val="94A3B8"/>
+                </a:solidFill>
+              </a:defRPr>
+            </a:pPr>
+            <a:r>
+              <a:t>• CTO Tech Impact: Enforces 1-5 Hop dependency graph traversal before any UPDATE, SUSPEND, or REVOKE action.</a:t>
+            </a:r>
+          </a:p>
+        </p:txBody>
+      </p:sp>
+      <p:pic>
+        <p:nvPicPr>
+          <p:cNvPr id="5" name="Picture 4" descr="chart1_entities.png"/>
+          <p:cNvPicPr>
+            <a:picLocks noChangeAspect="1"/>
+          </p:cNvPicPr>
+          <p:nvPr/>
+        </p:nvPicPr>
+        <p:blipFill>
+          <a:blip r:embed="rId2"/>
+          <a:stretch>
+            <a:fillRect/>
+          </a:stretch>
+        </p:blipFill>
+        <p:spPr>
+          <a:xfrm>
+            <a:off x="6035040" y="1371600"/>
+            <a:ext cx="5394960" cy="4937760"/>
           </a:xfrm>
           <a:prstGeom prst="rect">
             <a:avLst/>
           </a:prstGeom>
-          <a:noFill/>
-        </p:spPr>
-        <p:txBody>
-          <a:bodyPr wrap="square">
-            <a:spAutoFit/>
-          </a:bodyPr>
-          <a:lstStyle/>
-          <a:p>
-            <a:pPr>
-              <a:spcAft>
-                <a:spcPts val="1200"/>
-              </a:spcAft>
-              <a:defRPr sz="1600" b="1">
-                <a:solidFill>
-                  <a:srgbClr val="22C55E"/>
-                </a:solidFill>
-              </a:defRPr>
-            </a:pPr>
-            <a:r>
-              <a:t>🛡️ GuardianIQ Business Mandate</a:t>
-            </a:r>
-          </a:p>
-          <a:p>
-            <a:pPr>
-              <a:spcAft>
-                <a:spcPts val="800"/>
-              </a:spcAft>
-              <a:defRPr sz="1200" b="1">
-                <a:solidFill>
-                  <a:srgbClr val="FFFFFF"/>
-                </a:solidFill>
-              </a:defRPr>
-            </a:pPr>
-            <a:r>
-              <a:t>• 100% Entity Coverage: </a:t>
-            </a:r>
-            <a:r>
-              <a:rPr b="0">
-                <a:solidFill>
-                  <a:srgbClr val="94A3B8"/>
-                </a:solidFill>
-              </a:rPr>
-              <a:t>Map and govern all 47 enterprise entities across 7 AI Agents, 11 Models, 6 Tools, 6 Workflows, 4 Data Sources, and 13 Departments.</a:t>
-            </a:r>
-          </a:p>
-          <a:p>
-            <a:pPr>
-              <a:spcAft>
-                <a:spcPts val="800"/>
-              </a:spcAft>
-              <a:defRPr sz="1200" b="1">
-                <a:solidFill>
-                  <a:srgbClr val="FFFFFF"/>
-                </a:solidFill>
-              </a:defRPr>
-            </a:pPr>
-            <a:r>
-              <a:t>• Strict Governance Ownership: </a:t>
-            </a:r>
-            <a:r>
-              <a:rPr b="0">
-                <a:solidFill>
-                  <a:srgbClr val="94A3B8"/>
-                </a:solidFill>
-              </a:rPr>
-              <a:t>Guarantee exactly 1 active primary OWNER per entity to ensure clear accountability for operational changes.</a:t>
-            </a:r>
-          </a:p>
-          <a:p>
-            <a:pPr>
-              <a:spcAft>
-                <a:spcPts val="800"/>
-              </a:spcAft>
-              <a:defRPr sz="1200" b="1">
-                <a:solidFill>
-                  <a:srgbClr val="FFFFFF"/>
-                </a:solidFill>
-              </a:defRPr>
-            </a:pPr>
-            <a:r>
-              <a:t>• Blast Radius Pre-Flight: </a:t>
-            </a:r>
-            <a:r>
-              <a:rPr b="0">
-                <a:solidFill>
-                  <a:srgbClr val="94A3B8"/>
-                </a:solidFill>
-              </a:rPr>
-              <a:t>Execute multi-hop (1-5 Hops) impact analysis prior to any UPDATE, SUSPEND, or REVOKE operation.</a:t>
-            </a:r>
-          </a:p>
-          <a:p>
-            <a:pPr>
-              <a:spcAft>
-                <a:spcPts val="800"/>
-              </a:spcAft>
-              <a:defRPr sz="1200" b="1">
-                <a:solidFill>
-                  <a:srgbClr val="FFFFFF"/>
-                </a:solidFill>
-              </a:defRPr>
-            </a:pPr>
-            <a:r>
-              <a:t>• Tenant Boundary Isolation: </a:t>
-            </a:r>
-            <a:r>
-              <a:rPr b="0">
-                <a:solidFill>
-                  <a:srgbClr val="94A3B8"/>
-                </a:solidFill>
-              </a:rPr>
-              <a:t>Enforce strict UUID-based multi-tenancy preventing unauthorized cross-tenant linking.</a:t>
-            </a:r>
-          </a:p>
-        </p:txBody>
-      </p:sp>
+        </p:spPr>
+      </p:pic>
     </p:spTree>
   </p:cSld>
   <p:clrMapOvr>
@@ -4004,6 +4395,14 @@
 <file path=ppt/slides/slide3.xml><?xml version="1.0" encoding="utf-8"?>
 <p:sld xmlns:a="http://schemas.openxmlformats.org/drawingml/2006/main" xmlns:p="http://schemas.openxmlformats.org/presentationml/2006/main" xmlns:r="http://schemas.openxmlformats.org/officeDocument/2006/relationships">
   <p:cSld>
+    <p:bg>
+      <p:bgPr>
+        <a:solidFill>
+          <a:srgbClr val="0F172A"/>
+        </a:solidFill>
+        <a:effectLst/>
+      </p:bgPr>
+    </p:bg>
     <p:spTree>
       <p:nvGrpSpPr>
         <p:cNvPr id="1" name=""/>
@@ -4013,129 +4412,61 @@
       <p:grpSpPr/>
       <p:sp>
         <p:nvSpPr>
-          <p:cNvPr id="2" name="Rectangle 1"/>
-          <p:cNvSpPr/>
-          <p:nvPr/>
-        </p:nvSpPr>
-        <p:spPr>
-          <a:xfrm>
-            <a:off x="0" y="0"/>
-            <a:ext cx="12191695" cy="6858000"/>
+          <p:cNvPr id="2" name="TextBox 1"/>
+          <p:cNvSpPr txBox="1"/>
+          <p:nvPr/>
+        </p:nvSpPr>
+        <p:spPr>
+          <a:xfrm>
+            <a:off x="731520" y="365760"/>
+            <a:ext cx="10728655" cy="822960"/>
           </a:xfrm>
           <a:prstGeom prst="rect">
             <a:avLst/>
           </a:prstGeom>
-          <a:solidFill>
-            <a:srgbClr val="0F172A"/>
-          </a:solidFill>
-          <a:ln>
-            <a:solidFill>
-              <a:srgbClr val="0F172A"/>
-            </a:solidFill>
-          </a:ln>
-        </p:spPr>
-        <p:style>
-          <a:lnRef idx="1">
-            <a:schemeClr val="accent1"/>
-          </a:lnRef>
-          <a:fillRef idx="3">
-            <a:schemeClr val="accent1"/>
-          </a:fillRef>
-          <a:effectRef idx="2">
-            <a:schemeClr val="accent1"/>
-          </a:effectRef>
-          <a:fontRef idx="minor">
-            <a:schemeClr val="lt1"/>
-          </a:fontRef>
-        </p:style>
-        <p:txBody>
-          <a:bodyPr rtlCol="0" anchor="ctr"/>
-          <a:lstStyle/>
-          <a:p>
-            <a:pPr algn="ctr"/>
-          </a:p>
-        </p:txBody>
-      </p:sp>
-      <p:sp>
-        <p:nvSpPr>
-          <p:cNvPr id="3" name="TextBox 2"/>
-          <p:cNvSpPr txBox="1"/>
-          <p:nvPr/>
-        </p:nvSpPr>
-        <p:spPr>
-          <a:xfrm>
-            <a:off x="731520" y="365760"/>
-            <a:ext cx="10698480" cy="365760"/>
-          </a:xfrm>
-          <a:prstGeom prst="rect">
-            <a:avLst/>
-          </a:prstGeom>
           <a:noFill/>
         </p:spPr>
         <p:txBody>
-          <a:bodyPr wrap="square">
+          <a:bodyPr wrap="square" lIns="0" tIns="0" rIns="0" bIns="0">
             <a:spAutoFit/>
           </a:bodyPr>
           <a:lstStyle/>
           <a:p>
             <a:pPr>
-              <a:defRPr sz="1000" b="1">
-                <a:solidFill>
-                  <a:srgbClr val="38BDF8"/>
-                </a:solidFill>
-              </a:defRPr>
-            </a:pPr>
-            <a:r>
-              <a:t>QUALITY ASSURANCE AUDIT</a:t>
-            </a:r>
-          </a:p>
-        </p:txBody>
-      </p:sp>
-      <p:sp>
-        <p:nvSpPr>
-          <p:cNvPr id="4" name="TextBox 3"/>
-          <p:cNvSpPr txBox="1"/>
-          <p:nvPr/>
-        </p:nvSpPr>
-        <p:spPr>
-          <a:xfrm>
-            <a:off x="731520" y="640080"/>
-            <a:ext cx="10698480" cy="548640"/>
-          </a:xfrm>
-          <a:prstGeom prst="rect">
-            <a:avLst/>
-          </a:prstGeom>
-          <a:noFill/>
-        </p:spPr>
-        <p:txBody>
-          <a:bodyPr wrap="square">
-            <a:spAutoFit/>
-          </a:bodyPr>
-          <a:lstStyle/>
-          <a:p>
-            <a:pPr>
-              <a:defRPr sz="2200" b="1">
-                <a:solidFill>
-                  <a:srgbClr val="FFFFFF"/>
-                </a:solidFill>
-              </a:defRPr>
-            </a:pPr>
-            <a:r>
-              <a:t>System Features Evaluation &amp; Pass/Fail Metrics</a:t>
-            </a:r>
-          </a:p>
-        </p:txBody>
-      </p:sp>
-      <p:sp>
-        <p:nvSpPr>
-          <p:cNvPr id="5" name="Rounded Rectangle 4"/>
+              <a:defRPr sz="900" b="1">
+                <a:solidFill>
+                  <a:srgbClr val="06B6D4"/>
+                </a:solidFill>
+              </a:defRPr>
+            </a:pPr>
+            <a:r>
+              <a:t>GUARDIANIQ ENTERPRISE AI GOVERNANCE PLATFORM</a:t>
+            </a:r>
+          </a:p>
+          <a:p>
+            <a:pPr>
+              <a:defRPr sz="2000" b="1">
+                <a:solidFill>
+                  <a:srgbClr val="F8FAFC"/>
+                </a:solidFill>
+              </a:defRPr>
+            </a:pPr>
+            <a:r>
+              <a:t>Overall Quality Assurance &amp; Defect Remediation Dashboard</a:t>
+            </a:r>
+          </a:p>
+        </p:txBody>
+      </p:sp>
+      <p:sp>
+        <p:nvSpPr>
+          <p:cNvPr id="3" name="Rounded Rectangle 2"/>
           <p:cNvSpPr/>
           <p:nvPr/>
         </p:nvSpPr>
         <p:spPr>
           <a:xfrm>
-            <a:off x="731520" y="1280160"/>
-            <a:ext cx="2514600" cy="1143000"/>
+            <a:off x="731520" y="1371600"/>
+            <a:ext cx="2560320" cy="1097280"/>
           </a:xfrm>
           <a:prstGeom prst="roundRect">
             <a:avLst/>
@@ -4173,14 +4504,14 @@
       </p:sp>
       <p:sp>
         <p:nvSpPr>
-          <p:cNvPr id="6" name="TextBox 5"/>
+          <p:cNvPr id="4" name="TextBox 3"/>
           <p:cNvSpPr txBox="1"/>
           <p:nvPr/>
         </p:nvSpPr>
         <p:spPr>
           <a:xfrm>
-            <a:off x="822960" y="1371600"/>
-            <a:ext cx="2331720" cy="960120"/>
+            <a:off x="868680" y="1417320"/>
+            <a:ext cx="2286000" cy="1005840"/>
           </a:xfrm>
           <a:prstGeom prst="rect">
             <a:avLst/>
@@ -4194,10 +4525,7 @@
           <a:lstStyle/>
           <a:p>
             <a:pPr>
-              <a:spcAft>
-                <a:spcPts val="400"/>
-              </a:spcAft>
-              <a:defRPr sz="900" b="1">
+              <a:defRPr sz="800" b="1">
                 <a:solidFill>
                   <a:srgbClr val="94A3B8"/>
                 </a:solidFill>
@@ -4209,9 +4537,9 @@
           </a:p>
           <a:p>
             <a:pPr>
-              <a:defRPr sz="2000" b="1">
-                <a:solidFill>
-                  <a:srgbClr val="38BDF8"/>
+              <a:defRPr sz="1600" b="1">
+                <a:solidFill>
+                  <a:srgbClr val="10B981"/>
                 </a:solidFill>
               </a:defRPr>
             </a:pPr>
@@ -4219,18 +4547,30 @@
               <a:t>22 / 22</a:t>
             </a:r>
           </a:p>
-        </p:txBody>
-      </p:sp>
-      <p:sp>
-        <p:nvSpPr>
-          <p:cNvPr id="7" name="Rounded Rectangle 6"/>
+          <a:p>
+            <a:pPr>
+              <a:defRPr sz="800">
+                <a:solidFill>
+                  <a:srgbClr val="F8FAFC"/>
+                </a:solidFill>
+              </a:defRPr>
+            </a:pPr>
+            <a:r>
+              <a:t>100% Pass Rate</a:t>
+            </a:r>
+          </a:p>
+        </p:txBody>
+      </p:sp>
+      <p:sp>
+        <p:nvSpPr>
+          <p:cNvPr id="5" name="Rounded Rectangle 4"/>
           <p:cNvSpPr/>
           <p:nvPr/>
         </p:nvSpPr>
         <p:spPr>
           <a:xfrm>
-            <a:off x="3429000" y="1280160"/>
-            <a:ext cx="2514600" cy="1143000"/>
+            <a:off x="3456432" y="1371600"/>
+            <a:ext cx="2560320" cy="1097280"/>
           </a:xfrm>
           <a:prstGeom prst="roundRect">
             <a:avLst/>
@@ -4268,14 +4608,14 @@
       </p:sp>
       <p:sp>
         <p:nvSpPr>
-          <p:cNvPr id="8" name="TextBox 7"/>
+          <p:cNvPr id="6" name="TextBox 5"/>
           <p:cNvSpPr txBox="1"/>
           <p:nvPr/>
         </p:nvSpPr>
         <p:spPr>
           <a:xfrm>
-            <a:off x="3520440" y="1371600"/>
-            <a:ext cx="2331720" cy="960120"/>
+            <a:off x="3593592" y="1417320"/>
+            <a:ext cx="2286000" cy="1005840"/>
           </a:xfrm>
           <a:prstGeom prst="rect">
             <a:avLst/>
@@ -4289,43 +4629,52 @@
           <a:lstStyle/>
           <a:p>
             <a:pPr>
-              <a:spcAft>
-                <a:spcPts val="400"/>
-              </a:spcAft>
-              <a:defRPr sz="900" b="1">
+              <a:defRPr sz="800" b="1">
                 <a:solidFill>
                   <a:srgbClr val="94A3B8"/>
                 </a:solidFill>
               </a:defRPr>
             </a:pPr>
             <a:r>
-              <a:t>FINAL PASS RATE</a:t>
-            </a:r>
-          </a:p>
-          <a:p>
-            <a:pPr>
-              <a:defRPr sz="2000" b="1">
-                <a:solidFill>
-                  <a:srgbClr val="22C55E"/>
-                </a:solidFill>
-              </a:defRPr>
-            </a:pPr>
-            <a:r>
-              <a:t>100%</a:t>
-            </a:r>
-          </a:p>
-        </p:txBody>
-      </p:sp>
-      <p:sp>
-        <p:nvSpPr>
-          <p:cNvPr id="9" name="Rounded Rectangle 8"/>
+              <a:t>INITIAL DEFECTS</a:t>
+            </a:r>
+          </a:p>
+          <a:p>
+            <a:pPr>
+              <a:defRPr sz="1600" b="1">
+                <a:solidFill>
+                  <a:srgbClr val="10B981"/>
+                </a:solidFill>
+              </a:defRPr>
+            </a:pPr>
+            <a:r>
+              <a:t>6 Defects</a:t>
+            </a:r>
+          </a:p>
+          <a:p>
+            <a:pPr>
+              <a:defRPr sz="800">
+                <a:solidFill>
+                  <a:srgbClr val="F8FAFC"/>
+                </a:solidFill>
+              </a:defRPr>
+            </a:pPr>
+            <a:r>
+              <a:t>100% Remediated</a:t>
+            </a:r>
+          </a:p>
+        </p:txBody>
+      </p:sp>
+      <p:sp>
+        <p:nvSpPr>
+          <p:cNvPr id="7" name="Rounded Rectangle 6"/>
           <p:cNvSpPr/>
           <p:nvPr/>
         </p:nvSpPr>
         <p:spPr>
           <a:xfrm>
-            <a:off x="6126480" y="1280160"/>
-            <a:ext cx="2514600" cy="1143000"/>
+            <a:off x="6181344" y="1371600"/>
+            <a:ext cx="2560320" cy="1097280"/>
           </a:xfrm>
           <a:prstGeom prst="roundRect">
             <a:avLst/>
@@ -4363,14 +4712,14 @@
       </p:sp>
       <p:sp>
         <p:nvSpPr>
-          <p:cNvPr id="10" name="TextBox 9"/>
+          <p:cNvPr id="8" name="TextBox 7"/>
           <p:cNvSpPr txBox="1"/>
           <p:nvPr/>
         </p:nvSpPr>
         <p:spPr>
           <a:xfrm>
-            <a:off x="6217920" y="1371600"/>
-            <a:ext cx="2331720" cy="960120"/>
+            <a:off x="6318504" y="1417320"/>
+            <a:ext cx="2286000" cy="1005840"/>
           </a:xfrm>
           <a:prstGeom prst="rect">
             <a:avLst/>
@@ -4384,43 +4733,52 @@
           <a:lstStyle/>
           <a:p>
             <a:pPr>
-              <a:spcAft>
-                <a:spcPts val="400"/>
-              </a:spcAft>
-              <a:defRPr sz="900" b="1">
+              <a:defRPr sz="800" b="1">
                 <a:solidFill>
                   <a:srgbClr val="94A3B8"/>
                 </a:solidFill>
               </a:defRPr>
             </a:pPr>
             <a:r>
-              <a:t>INITIAL DEFECTS FOUND</a:t>
-            </a:r>
-          </a:p>
-          <a:p>
-            <a:pPr>
-              <a:defRPr sz="2000" b="1">
-                <a:solidFill>
-                  <a:srgbClr val="F59E0B"/>
-                </a:solidFill>
-              </a:defRPr>
-            </a:pPr>
-            <a:r>
-              <a:t>6 Defect(s)</a:t>
-            </a:r>
-          </a:p>
-        </p:txBody>
-      </p:sp>
-      <p:sp>
-        <p:nvSpPr>
-          <p:cNvPr id="11" name="Rounded Rectangle 10"/>
+              <a:t>CROSS-TENANT LEAKAGE</a:t>
+            </a:r>
+          </a:p>
+          <a:p>
+            <a:pPr>
+              <a:defRPr sz="1600" b="1">
+                <a:solidFill>
+                  <a:srgbClr val="06B6D4"/>
+                </a:solidFill>
+              </a:defRPr>
+            </a:pPr>
+            <a:r>
+              <a:t>0 Leakage</a:t>
+            </a:r>
+          </a:p>
+          <a:p>
+            <a:pPr>
+              <a:defRPr sz="800">
+                <a:solidFill>
+                  <a:srgbClr val="F8FAFC"/>
+                </a:solidFill>
+              </a:defRPr>
+            </a:pPr>
+            <a:r>
+              <a:t>Strict UUID Isolation</a:t>
+            </a:r>
+          </a:p>
+        </p:txBody>
+      </p:sp>
+      <p:sp>
+        <p:nvSpPr>
+          <p:cNvPr id="9" name="Rounded Rectangle 8"/>
           <p:cNvSpPr/>
           <p:nvPr/>
         </p:nvSpPr>
         <p:spPr>
           <a:xfrm>
-            <a:off x="8823960" y="1280160"/>
-            <a:ext cx="2514600" cy="1143000"/>
+            <a:off x="8906256" y="1371600"/>
+            <a:ext cx="2560320" cy="1097280"/>
           </a:xfrm>
           <a:prstGeom prst="roundRect">
             <a:avLst/>
@@ -4458,14 +4816,14 @@
       </p:sp>
       <p:sp>
         <p:nvSpPr>
-          <p:cNvPr id="12" name="TextBox 11"/>
+          <p:cNvPr id="10" name="TextBox 9"/>
           <p:cNvSpPr txBox="1"/>
           <p:nvPr/>
         </p:nvSpPr>
         <p:spPr>
           <a:xfrm>
-            <a:off x="8915400" y="1371600"/>
-            <a:ext cx="2331720" cy="960120"/>
+            <a:off x="9043416" y="1417320"/>
+            <a:ext cx="2286000" cy="1005840"/>
           </a:xfrm>
           <a:prstGeom prst="rect">
             <a:avLst/>
@@ -4479,43 +4837,76 @@
           <a:lstStyle/>
           <a:p>
             <a:pPr>
-              <a:spcAft>
-                <a:spcPts val="400"/>
-              </a:spcAft>
-              <a:defRPr sz="900" b="1">
+              <a:defRPr sz="800" b="1">
                 <a:solidFill>
                   <a:srgbClr val="94A3B8"/>
                 </a:solidFill>
               </a:defRPr>
             </a:pPr>
             <a:r>
-              <a:t>REMEDIATED &amp; VERIFIED</a:t>
-            </a:r>
-          </a:p>
-          <a:p>
-            <a:pPr>
-              <a:defRPr sz="2000" b="1">
-                <a:solidFill>
-                  <a:srgbClr val="22C55E"/>
-                </a:solidFill>
-              </a:defRPr>
-            </a:pPr>
-            <a:r>
-              <a:t>6 / 6 (100%)</a:t>
-            </a:r>
-          </a:p>
-        </p:txBody>
-      </p:sp>
-      <p:sp>
-        <p:nvSpPr>
-          <p:cNvPr id="13" name="Rounded Rectangle 12"/>
+              <a:t>BUILD &amp; TYPESCRIPT</a:t>
+            </a:r>
+          </a:p>
+          <a:p>
+            <a:pPr>
+              <a:defRPr sz="1600" b="1">
+                <a:solidFill>
+                  <a:srgbClr val="38BDF8"/>
+                </a:solidFill>
+              </a:defRPr>
+            </a:pPr>
+            <a:r>
+              <a:t>0 Errors</a:t>
+            </a:r>
+          </a:p>
+          <a:p>
+            <a:pPr>
+              <a:defRPr sz="800">
+                <a:solidFill>
+                  <a:srgbClr val="F8FAFC"/>
+                </a:solidFill>
+              </a:defRPr>
+            </a:pPr>
+            <a:r>
+              <a:t>Clean Production Build</a:t>
+            </a:r>
+          </a:p>
+        </p:txBody>
+      </p:sp>
+      <p:pic>
+        <p:nvPicPr>
+          <p:cNvPr id="11" name="Picture 10" descr="chart2_qa_defects.png"/>
+          <p:cNvPicPr>
+            <a:picLocks noChangeAspect="1"/>
+          </p:cNvPicPr>
+          <p:nvPr/>
+        </p:nvPicPr>
+        <p:blipFill>
+          <a:blip r:embed="rId2"/>
+          <a:stretch>
+            <a:fillRect/>
+          </a:stretch>
+        </p:blipFill>
+        <p:spPr>
+          <a:xfrm>
+            <a:off x="731520" y="2651760"/>
+            <a:ext cx="6217920" cy="3657600"/>
+          </a:xfrm>
+          <a:prstGeom prst="rect">
+            <a:avLst/>
+          </a:prstGeom>
+        </p:spPr>
+      </p:pic>
+      <p:sp>
+        <p:nvSpPr>
+          <p:cNvPr id="12" name="Rounded Rectangle 11"/>
           <p:cNvSpPr/>
           <p:nvPr/>
         </p:nvSpPr>
         <p:spPr>
           <a:xfrm>
-            <a:off x="731520" y="2651760"/>
-            <a:ext cx="10698480" cy="3566160"/>
+            <a:off x="7132320" y="2651760"/>
+            <a:ext cx="4327855" cy="3657600"/>
           </a:xfrm>
           <a:prstGeom prst="roundRect">
             <a:avLst/>
@@ -4553,14 +4944,14 @@
       </p:sp>
       <p:sp>
         <p:nvSpPr>
-          <p:cNvPr id="14" name="TextBox 13"/>
+          <p:cNvPr id="13" name="TextBox 12"/>
           <p:cNvSpPr txBox="1"/>
           <p:nvPr/>
         </p:nvSpPr>
         <p:spPr>
           <a:xfrm>
-            <a:off x="914400" y="2834640"/>
-            <a:ext cx="10332720" cy="3200400"/>
+            <a:off x="7315200" y="2788920"/>
+            <a:ext cx="3962095" cy="3383280"/>
           </a:xfrm>
           <a:prstGeom prst="rect">
             <a:avLst/>
@@ -4575,202 +4966,178 @@
           <a:p>
             <a:pPr>
               <a:spcAft>
-                <a:spcPts val="1000"/>
+                <a:spcPts val="800"/>
               </a:spcAft>
-              <a:defRPr sz="1500" b="1">
-                <a:solidFill>
-                  <a:srgbClr val="FFFFFF"/>
-                </a:solidFill>
-              </a:defRPr>
-            </a:pPr>
-            <a:r>
-              <a:t>Workstream Functional Audit Summary</a:t>
+              <a:defRPr sz="1300" b="1">
+                <a:solidFill>
+                  <a:srgbClr val="06B6D4"/>
+                </a:solidFill>
+              </a:defRPr>
+            </a:pPr>
+            <a:r>
+              <a:t>Workstream Functional Audit Verdicts</a:t>
+            </a:r>
+          </a:p>
+          <a:p>
+            <a:pPr>
+              <a:defRPr sz="1000" b="1">
+                <a:solidFill>
+                  <a:srgbClr val="F8FAFC"/>
+                </a:solidFill>
+              </a:defRPr>
+            </a:pPr>
+            <a:r>
+              <a:t>Database &amp; Schema: 🟢 PASSED</a:t>
             </a:r>
           </a:p>
           <a:p>
             <a:pPr>
               <a:spcAft>
-                <a:spcPts val="600"/>
+                <a:spcPts val="400"/>
               </a:spcAft>
-              <a:defRPr sz="1100" b="1">
-                <a:solidFill>
-                  <a:srgbClr val="FFFFFF"/>
-                </a:solidFill>
-              </a:defRPr>
-            </a:pPr>
-            <a:r>
-              <a:t>• Database &amp; Migration Schema: </a:t>
-            </a:r>
-            <a:r>
-              <a:rPr b="0">
+              <a:defRPr sz="900">
                 <a:solidFill>
                   <a:srgbClr val="94A3B8"/>
                 </a:solidFill>
-              </a:rPr>
-              <a:t>Consolidated schema, UUID tenant_id, FKs, composite indexes  |  </a:t>
-            </a:r>
-            <a:r>
-              <a:rPr b="1">
-                <a:solidFill>
-                  <a:srgbClr val="22C55E"/>
-                </a:solidFill>
-              </a:rPr>
-              <a:t>🟢 PASSED (100% Verified)</a:t>
+              </a:defRPr>
+            </a:pPr>
+            <a:r>
+              <a:t>  Consolidated schema, UUID tenant_id</a:t>
+            </a:r>
+          </a:p>
+          <a:p>
+            <a:pPr>
+              <a:defRPr sz="1000" b="1">
+                <a:solidFill>
+                  <a:srgbClr val="F8FAFC"/>
+                </a:solidFill>
+              </a:defRPr>
+            </a:pPr>
+            <a:r>
+              <a:t>Backend Services: 🟢 PASSED</a:t>
             </a:r>
           </a:p>
           <a:p>
             <a:pPr>
               <a:spcAft>
-                <a:spcPts val="600"/>
+                <a:spcPts val="400"/>
               </a:spcAft>
-              <a:defRPr sz="1100" b="1">
-                <a:solidFill>
-                  <a:srgbClr val="FFFFFF"/>
-                </a:solidFill>
-              </a:defRPr>
-            </a:pPr>
-            <a:r>
-              <a:t>• Backend Services &amp; CRUD: </a:t>
-            </a:r>
-            <a:r>
-              <a:rPr b="0">
+              <a:defRPr sz="900">
                 <a:solidFill>
                   <a:srgbClr val="94A3B8"/>
                 </a:solidFill>
-              </a:rPr>
-              <a:t>RelationshipService, ResponsibilityService, Audit Event logging  |  </a:t>
-            </a:r>
-            <a:r>
-              <a:rPr b="1">
-                <a:solidFill>
-                  <a:srgbClr val="22C55E"/>
-                </a:solidFill>
-              </a:rPr>
-              <a:t>🟢 PASSED (100% Verified)</a:t>
+              </a:defRPr>
+            </a:pPr>
+            <a:r>
+              <a:t>  CRUD, Responsibility, Event Audit</a:t>
+            </a:r>
+          </a:p>
+          <a:p>
+            <a:pPr>
+              <a:defRPr sz="1000" b="1">
+                <a:solidFill>
+                  <a:srgbClr val="F8FAFC"/>
+                </a:solidFill>
+              </a:defRPr>
+            </a:pPr>
+            <a:r>
+              <a:t>Validation Engine: 🟢 PASSED</a:t>
             </a:r>
           </a:p>
           <a:p>
             <a:pPr>
               <a:spcAft>
-                <a:spcPts val="600"/>
+                <a:spcPts val="400"/>
               </a:spcAft>
-              <a:defRPr sz="1100" b="1">
-                <a:solidFill>
-                  <a:srgbClr val="FFFFFF"/>
-                </a:solidFill>
-              </a:defRPr>
-            </a:pPr>
-            <a:r>
-              <a:t>• High-Risk Validation Engine: </a:t>
-            </a:r>
-            <a:r>
-              <a:rPr b="0">
+              <a:defRPr sz="900">
                 <a:solidFill>
                   <a:srgbClr val="94A3B8"/>
                 </a:solidFill>
-              </a:rPr>
-              <a:t>7 mandatory runtime rules, dry-run evaluation endpoint  |  </a:t>
-            </a:r>
-            <a:r>
-              <a:rPr b="1">
-                <a:solidFill>
-                  <a:srgbClr val="22C55E"/>
-                </a:solidFill>
-              </a:rPr>
-              <a:t>🟢 PASSED (100% Verified)</a:t>
+              </a:defRPr>
+            </a:pPr>
+            <a:r>
+              <a:t>  7 mandatory runtime rules, dry-run API</a:t>
+            </a:r>
+          </a:p>
+          <a:p>
+            <a:pPr>
+              <a:defRPr sz="1000" b="1">
+                <a:solidFill>
+                  <a:srgbClr val="F8FAFC"/>
+                </a:solidFill>
+              </a:defRPr>
+            </a:pPr>
+            <a:r>
+              <a:t>Graph Resolver: 🟢 PASSED</a:t>
             </a:r>
           </a:p>
           <a:p>
             <a:pPr>
               <a:spcAft>
-                <a:spcPts val="600"/>
+                <a:spcPts val="400"/>
               </a:spcAft>
-              <a:defRPr sz="1100" b="1">
-                <a:solidFill>
-                  <a:srgbClr val="FFFFFF"/>
-                </a:solidFill>
-              </a:defRPr>
-            </a:pPr>
-            <a:r>
-              <a:t>• Graph Resolver &amp; Depth API: </a:t>
-            </a:r>
-            <a:r>
-              <a:rPr b="0">
+              <a:defRPr sz="900">
                 <a:solidFill>
                   <a:srgbClr val="94A3B8"/>
                 </a:solidFill>
-              </a:rPr>
-              <a:t>1 to 5 Hops recursive graph traversal &amp; in-memory LRU cache  |  </a:t>
-            </a:r>
-            <a:r>
-              <a:rPr b="1">
-                <a:solidFill>
-                  <a:srgbClr val="22C55E"/>
-                </a:solidFill>
-              </a:rPr>
-              <a:t>🟢 PASSED (38 ms Avg Latency)</a:t>
+              </a:defRPr>
+            </a:pPr>
+            <a:r>
+              <a:t>  1-5 Hops traversal, 38ms avg latency</a:t>
+            </a:r>
+          </a:p>
+          <a:p>
+            <a:pPr>
+              <a:defRPr sz="1000" b="1">
+                <a:solidFill>
+                  <a:srgbClr val="F8FAFC"/>
+                </a:solidFill>
+              </a:defRPr>
+            </a:pPr>
+            <a:r>
+              <a:t>Frontend Explorer: 🟢 PASSED</a:t>
             </a:r>
           </a:p>
           <a:p>
             <a:pPr>
               <a:spcAft>
-                <a:spcPts val="600"/>
+                <a:spcPts val="400"/>
               </a:spcAft>
-              <a:defRPr sz="1100" b="1">
-                <a:solidFill>
-                  <a:srgbClr val="FFFFFF"/>
-                </a:solidFill>
-              </a:defRPr>
-            </a:pPr>
-            <a:r>
-              <a:t>• Frontend Explorer &amp; Graph UI: </a:t>
-            </a:r>
-            <a:r>
-              <a:rPr b="0">
+              <a:defRPr sz="900">
                 <a:solidFill>
                   <a:srgbClr val="94A3B8"/>
                 </a:solidFill>
-              </a:rPr>
-              <a:t>React Flow canvas, depth controls, non-clipping sticky sidebar  |  </a:t>
-            </a:r>
-            <a:r>
-              <a:rPr b="1">
-                <a:solidFill>
-                  <a:srgbClr val="22C55E"/>
-                </a:solidFill>
-              </a:rPr>
-              <a:t>🟢 PASSED (0 TS Errors)</a:t>
+              </a:defRPr>
+            </a:pPr>
+            <a:r>
+              <a:t>  React Flow canvas, depth controls</a:t>
+            </a:r>
+          </a:p>
+          <a:p>
+            <a:pPr>
+              <a:defRPr sz="1000" b="1">
+                <a:solidFill>
+                  <a:srgbClr val="F8FAFC"/>
+                </a:solidFill>
+              </a:defRPr>
+            </a:pPr>
+            <a:r>
+              <a:t>Defect Remediation: 🟢 6/6 FIXED</a:t>
             </a:r>
           </a:p>
           <a:p>
             <a:pPr>
               <a:spcAft>
-                <a:spcPts val="600"/>
+                <a:spcPts val="400"/>
               </a:spcAft>
-              <a:defRPr sz="1100" b="1">
-                <a:solidFill>
-                  <a:srgbClr val="FFFFFF"/>
-                </a:solidFill>
-              </a:defRPr>
-            </a:pPr>
-            <a:r>
-              <a:t>• Initial Defects Remediation: </a:t>
-            </a:r>
-            <a:r>
-              <a:rPr b="0">
+              <a:defRPr sz="900">
                 <a:solidFill>
                   <a:srgbClr val="94A3B8"/>
                 </a:solidFill>
-              </a:rPr>
-              <a:t>DEF-01 through DEF-06 resolved and verified with pytest suite  |  </a:t>
-            </a:r>
-            <a:r>
-              <a:rPr b="1">
-                <a:solidFill>
-                  <a:srgbClr val="F59E0B"/>
-                </a:solidFill>
-              </a:rPr>
-              <a:t>🟢 RE-TESTED PASS (6/6 Fixed)</a:t>
+              </a:defRPr>
+            </a:pPr>
+            <a:r>
+              <a:t>  DEF-01 to DEF-06 fully verified</a:t>
             </a:r>
           </a:p>
         </p:txBody>
@@ -4786,6 +5153,14 @@
 <file path=ppt/slides/slide4.xml><?xml version="1.0" encoding="utf-8"?>
 <p:sld xmlns:a="http://schemas.openxmlformats.org/drawingml/2006/main" xmlns:p="http://schemas.openxmlformats.org/presentationml/2006/main" xmlns:r="http://schemas.openxmlformats.org/officeDocument/2006/relationships">
   <p:cSld>
+    <p:bg>
+      <p:bgPr>
+        <a:solidFill>
+          <a:srgbClr val="0F172A"/>
+        </a:solidFill>
+        <a:effectLst/>
+      </p:bgPr>
+    </p:bg>
     <p:spTree>
       <p:nvGrpSpPr>
         <p:cNvPr id="1" name=""/>
@@ -4795,129 +5170,61 @@
       <p:grpSpPr/>
       <p:sp>
         <p:nvSpPr>
-          <p:cNvPr id="2" name="Rectangle 1"/>
-          <p:cNvSpPr/>
-          <p:nvPr/>
-        </p:nvSpPr>
-        <p:spPr>
-          <a:xfrm>
-            <a:off x="0" y="0"/>
-            <a:ext cx="12191695" cy="6858000"/>
+          <p:cNvPr id="2" name="TextBox 1"/>
+          <p:cNvSpPr txBox="1"/>
+          <p:nvPr/>
+        </p:nvSpPr>
+        <p:spPr>
+          <a:xfrm>
+            <a:off x="731520" y="365760"/>
+            <a:ext cx="10728655" cy="822960"/>
           </a:xfrm>
           <a:prstGeom prst="rect">
             <a:avLst/>
           </a:prstGeom>
-          <a:solidFill>
-            <a:srgbClr val="0F172A"/>
-          </a:solidFill>
-          <a:ln>
-            <a:solidFill>
-              <a:srgbClr val="0F172A"/>
-            </a:solidFill>
-          </a:ln>
-        </p:spPr>
-        <p:style>
-          <a:lnRef idx="1">
-            <a:schemeClr val="accent1"/>
-          </a:lnRef>
-          <a:fillRef idx="3">
-            <a:schemeClr val="accent1"/>
-          </a:fillRef>
-          <a:effectRef idx="2">
-            <a:schemeClr val="accent1"/>
-          </a:effectRef>
-          <a:fontRef idx="minor">
-            <a:schemeClr val="lt1"/>
-          </a:fontRef>
-        </p:style>
-        <p:txBody>
-          <a:bodyPr rtlCol="0" anchor="ctr"/>
-          <a:lstStyle/>
-          <a:p>
-            <a:pPr algn="ctr"/>
-          </a:p>
-        </p:txBody>
-      </p:sp>
-      <p:sp>
-        <p:nvSpPr>
-          <p:cNvPr id="3" name="TextBox 2"/>
-          <p:cNvSpPr txBox="1"/>
-          <p:nvPr/>
-        </p:nvSpPr>
-        <p:spPr>
-          <a:xfrm>
-            <a:off x="731520" y="365760"/>
-            <a:ext cx="10698480" cy="365760"/>
-          </a:xfrm>
-          <a:prstGeom prst="rect">
-            <a:avLst/>
-          </a:prstGeom>
           <a:noFill/>
         </p:spPr>
         <p:txBody>
-          <a:bodyPr wrap="square">
+          <a:bodyPr wrap="square" lIns="0" tIns="0" rIns="0" bIns="0">
             <a:spAutoFit/>
           </a:bodyPr>
           <a:lstStyle/>
           <a:p>
             <a:pPr>
-              <a:defRPr sz="1000" b="1">
-                <a:solidFill>
-                  <a:srgbClr val="38BDF8"/>
-                </a:solidFill>
-              </a:defRPr>
-            </a:pPr>
-            <a:r>
-              <a:t>PASSED FEATURES DEEP-DIVE</a:t>
-            </a:r>
-          </a:p>
-        </p:txBody>
-      </p:sp>
-      <p:sp>
-        <p:nvSpPr>
-          <p:cNvPr id="4" name="TextBox 3"/>
-          <p:cNvSpPr txBox="1"/>
-          <p:nvPr/>
-        </p:nvSpPr>
-        <p:spPr>
-          <a:xfrm>
-            <a:off x="731520" y="640080"/>
-            <a:ext cx="10698480" cy="548640"/>
-          </a:xfrm>
-          <a:prstGeom prst="rect">
-            <a:avLst/>
-          </a:prstGeom>
-          <a:noFill/>
-        </p:spPr>
-        <p:txBody>
-          <a:bodyPr wrap="square">
-            <a:spAutoFit/>
-          </a:bodyPr>
-          <a:lstStyle/>
-          <a:p>
-            <a:pPr>
-              <a:defRPr sz="2200" b="1">
-                <a:solidFill>
-                  <a:srgbClr val="FFFFFF"/>
-                </a:solidFill>
-              </a:defRPr>
-            </a:pPr>
-            <a:r>
-              <a:t>Backend Services, Schemas &amp; Runtime Validation Engine</a:t>
-            </a:r>
-          </a:p>
-        </p:txBody>
-      </p:sp>
-      <p:sp>
-        <p:nvSpPr>
-          <p:cNvPr id="5" name="Rounded Rectangle 4"/>
+              <a:defRPr sz="900" b="1">
+                <a:solidFill>
+                  <a:srgbClr val="06B6D4"/>
+                </a:solidFill>
+              </a:defRPr>
+            </a:pPr>
+            <a:r>
+              <a:t>GUARDIANIQ ENTERPRISE AI GOVERNANCE PLATFORM</a:t>
+            </a:r>
+          </a:p>
+          <a:p>
+            <a:pPr>
+              <a:defRPr sz="2000" b="1">
+                <a:solidFill>
+                  <a:srgbClr val="F8FAFC"/>
+                </a:solidFill>
+              </a:defRPr>
+            </a:pPr>
+            <a:r>
+              <a:t>CTO Technical Deep-Dive: Core Engine Architecture &amp; Rules</a:t>
+            </a:r>
+          </a:p>
+        </p:txBody>
+      </p:sp>
+      <p:sp>
+        <p:nvSpPr>
+          <p:cNvPr id="3" name="Rounded Rectangle 2"/>
           <p:cNvSpPr/>
           <p:nvPr/>
         </p:nvSpPr>
         <p:spPr>
           <a:xfrm>
             <a:off x="731520" y="1371600"/>
-            <a:ext cx="5212080" cy="2148840"/>
+            <a:ext cx="5257800" cy="2331720"/>
           </a:xfrm>
           <a:prstGeom prst="roundRect">
             <a:avLst/>
@@ -4955,14 +5262,14 @@
       </p:sp>
       <p:sp>
         <p:nvSpPr>
-          <p:cNvPr id="6" name="TextBox 5"/>
+          <p:cNvPr id="4" name="TextBox 3"/>
           <p:cNvSpPr txBox="1"/>
           <p:nvPr/>
         </p:nvSpPr>
         <p:spPr>
           <a:xfrm>
             <a:off x="914400" y="1554480"/>
-            <a:ext cx="4846320" cy="1783080"/>
+            <a:ext cx="4892040" cy="1965960"/>
           </a:xfrm>
           <a:prstGeom prst="rect">
             <a:avLst/>
@@ -4977,45 +5284,42 @@
           <a:p>
             <a:pPr>
               <a:spcAft>
-                <a:spcPts val="800"/>
+                <a:spcPts val="600"/>
               </a:spcAft>
-              <a:defRPr sz="1400" b="1">
-                <a:solidFill>
-                  <a:srgbClr val="22C55E"/>
-                </a:solidFill>
-              </a:defRPr>
-            </a:pPr>
-            <a:r>
-              <a:t>🟢 Consolidated Schema &amp; Multi-Tenancy</a:t>
-            </a:r>
-          </a:p>
-          <a:p>
-            <a:pPr>
-              <a:lnSpc>
-                <a:spcPct val="115000"/>
-              </a:lnSpc>
-              <a:defRPr sz="1100">
+              <a:defRPr sz="1300" b="1">
+                <a:solidFill>
+                  <a:srgbClr val="06B6D4"/>
+                </a:solidFill>
+              </a:defRPr>
+            </a:pPr>
+            <a:r>
+              <a:t>1. Consolidated Schema &amp; Multi-Tenancy</a:t>
+            </a:r>
+          </a:p>
+          <a:p>
+            <a:pPr>
+              <a:defRPr sz="1000">
                 <a:solidFill>
                   <a:srgbClr val="94A3B8"/>
                 </a:solidFill>
               </a:defRPr>
             </a:pPr>
             <a:r>
-              <a:t>Enforces UUID-based tenant_id Foreign Keys linking to users.id. Prevents cross-tenant data leakage and normalizes generic relationships across all 6 asset types.</a:t>
-            </a:r>
-          </a:p>
-        </p:txBody>
-      </p:sp>
-      <p:sp>
-        <p:nvSpPr>
-          <p:cNvPr id="7" name="Rounded Rectangle 6"/>
+              <a:t>Enforces UUID-based tenant_id Foreign Keys linking directly to users.id. Prevents cross-tenant data leaks and normalizes generic relationships across all 6 asset categories (Agents, Models, Workflows, Tools, Data Sources, Departments).</a:t>
+            </a:r>
+          </a:p>
+        </p:txBody>
+      </p:sp>
+      <p:sp>
+        <p:nvSpPr>
+          <p:cNvPr id="5" name="Rounded Rectangle 4"/>
           <p:cNvSpPr/>
           <p:nvPr/>
         </p:nvSpPr>
         <p:spPr>
           <a:xfrm>
             <a:off x="6172200" y="1371600"/>
-            <a:ext cx="5212080" cy="2148840"/>
+            <a:ext cx="5257800" cy="2331720"/>
           </a:xfrm>
           <a:prstGeom prst="roundRect">
             <a:avLst/>
@@ -5053,14 +5357,14 @@
       </p:sp>
       <p:sp>
         <p:nvSpPr>
-          <p:cNvPr id="8" name="TextBox 7"/>
+          <p:cNvPr id="6" name="TextBox 5"/>
           <p:cNvSpPr txBox="1"/>
           <p:nvPr/>
         </p:nvSpPr>
         <p:spPr>
           <a:xfrm>
             <a:off x="6355080" y="1554480"/>
-            <a:ext cx="4846320" cy="1783080"/>
+            <a:ext cx="4892040" cy="1965960"/>
           </a:xfrm>
           <a:prstGeom prst="rect">
             <a:avLst/>
@@ -5075,45 +5379,42 @@
           <a:p>
             <a:pPr>
               <a:spcAft>
-                <a:spcPts val="800"/>
+                <a:spcPts val="600"/>
               </a:spcAft>
-              <a:defRPr sz="1400" b="1">
-                <a:solidFill>
-                  <a:srgbClr val="22C55E"/>
-                </a:solidFill>
-              </a:defRPr>
-            </a:pPr>
-            <a:r>
-              <a:t>🟢 Primary Owner Governance Engine</a:t>
-            </a:r>
-          </a:p>
-          <a:p>
-            <a:pPr>
-              <a:lnSpc>
-                <a:spcPct val="115000"/>
-              </a:lnSpc>
-              <a:defRPr sz="1100">
+              <a:defRPr sz="1300" b="1">
+                <a:solidFill>
+                  <a:srgbClr val="10B981"/>
+                </a:solidFill>
+              </a:defRPr>
+            </a:pPr>
+            <a:r>
+              <a:t>2. Primary Owner Governance Engine</a:t>
+            </a:r>
+          </a:p>
+          <a:p>
+            <a:pPr>
+              <a:defRPr sz="1000">
                 <a:solidFill>
                   <a:srgbClr val="94A3B8"/>
                 </a:solidFill>
               </a:defRPr>
             </a:pPr>
             <a:r>
-              <a:t>ResponsibilityService enforces exactly 1 active primary OWNER per entity. Assigning a new primary owner automatically revokes legacy primary owners in atomic DB transactions.</a:t>
-            </a:r>
-          </a:p>
-        </p:txBody>
-      </p:sp>
-      <p:sp>
-        <p:nvSpPr>
-          <p:cNvPr id="9" name="Rounded Rectangle 8"/>
+              <a:t>ResponsibilityService guarantees exactly 1 active primary OWNER per entity. Assigning a new primary owner automatically revokes legacy primary owners in atomic DB transactions with automatic rollbacks.</a:t>
+            </a:r>
+          </a:p>
+        </p:txBody>
+      </p:sp>
+      <p:sp>
+        <p:nvSpPr>
+          <p:cNvPr id="7" name="Rounded Rectangle 6"/>
           <p:cNvSpPr/>
           <p:nvPr/>
         </p:nvSpPr>
         <p:spPr>
           <a:xfrm>
-            <a:off x="731520" y="3749039"/>
-            <a:ext cx="5212080" cy="2148840"/>
+            <a:off x="731520" y="3886200"/>
+            <a:ext cx="5257800" cy="2331720"/>
           </a:xfrm>
           <a:prstGeom prst="roundRect">
             <a:avLst/>
@@ -5151,14 +5452,14 @@
       </p:sp>
       <p:sp>
         <p:nvSpPr>
-          <p:cNvPr id="10" name="TextBox 9"/>
+          <p:cNvPr id="8" name="TextBox 7"/>
           <p:cNvSpPr txBox="1"/>
           <p:nvPr/>
         </p:nvSpPr>
         <p:spPr>
           <a:xfrm>
-            <a:off x="914400" y="3931920"/>
-            <a:ext cx="4846320" cy="1783080"/>
+            <a:off x="914400" y="4069080"/>
+            <a:ext cx="4892040" cy="1965960"/>
           </a:xfrm>
           <a:prstGeom prst="rect">
             <a:avLst/>
@@ -5173,45 +5474,42 @@
           <a:p>
             <a:pPr>
               <a:spcAft>
-                <a:spcPts val="800"/>
+                <a:spcPts val="600"/>
               </a:spcAft>
-              <a:defRPr sz="1400" b="1">
-                <a:solidFill>
-                  <a:srgbClr val="22C55E"/>
-                </a:solidFill>
-              </a:defRPr>
-            </a:pPr>
-            <a:r>
-              <a:t>🟢 7-Rule Runtime Validation Engine</a:t>
-            </a:r>
-          </a:p>
-          <a:p>
-            <a:pPr>
-              <a:lnSpc>
-                <a:spcPct val="115000"/>
-              </a:lnSpc>
-              <a:defRPr sz="1100">
+              <a:defRPr sz="1300" b="1">
+                <a:solidFill>
+                  <a:srgbClr val="F59E0B"/>
+                </a:solidFill>
+              </a:defRPr>
+            </a:pPr>
+            <a:r>
+              <a:t>3. 7-Rule Runtime Validation Engine</a:t>
+            </a:r>
+          </a:p>
+          <a:p>
+            <a:pPr>
+              <a:defRPr sz="1000">
                 <a:solidFill>
                   <a:srgbClr val="94A3B8"/>
                 </a:solidFill>
               </a:defRPr>
             </a:pPr>
             <a:r>
-              <a:t>ValidationEngine blocks invalid link creations by checking source/target existence, tenant bounds, active duplicates, temporal validity, and mandatory ownership rules.</a:t>
-            </a:r>
-          </a:p>
-        </p:txBody>
-      </p:sp>
-      <p:sp>
-        <p:nvSpPr>
-          <p:cNvPr id="11" name="Rounded Rectangle 10"/>
+              <a:t>ValidationEngine blocks invalid link creation by enforcing 7 mandatory checks: Source/Target existence, Tenant matching, Active duplicate checks, Temporal boundary validity, and Ownership constraints.</a:t>
+            </a:r>
+          </a:p>
+        </p:txBody>
+      </p:sp>
+      <p:sp>
+        <p:nvSpPr>
+          <p:cNvPr id="9" name="Rounded Rectangle 8"/>
           <p:cNvSpPr/>
           <p:nvPr/>
         </p:nvSpPr>
         <p:spPr>
           <a:xfrm>
-            <a:off x="6172200" y="3749039"/>
-            <a:ext cx="5212080" cy="2148840"/>
+            <a:off x="6172200" y="3886200"/>
+            <a:ext cx="5257800" cy="2331720"/>
           </a:xfrm>
           <a:prstGeom prst="roundRect">
             <a:avLst/>
@@ -5249,14 +5547,14 @@
       </p:sp>
       <p:sp>
         <p:nvSpPr>
-          <p:cNvPr id="12" name="TextBox 11"/>
+          <p:cNvPr id="10" name="TextBox 9"/>
           <p:cNvSpPr txBox="1"/>
           <p:nvPr/>
         </p:nvSpPr>
         <p:spPr>
           <a:xfrm>
-            <a:off x="6355080" y="3931920"/>
-            <a:ext cx="4846320" cy="1783080"/>
+            <a:off x="6355080" y="4069080"/>
+            <a:ext cx="4892040" cy="1965960"/>
           </a:xfrm>
           <a:prstGeom prst="rect">
             <a:avLst/>
@@ -5271,31 +5569,28 @@
           <a:p>
             <a:pPr>
               <a:spcAft>
-                <a:spcPts val="800"/>
+                <a:spcPts val="600"/>
               </a:spcAft>
-              <a:defRPr sz="1400" b="1">
-                <a:solidFill>
-                  <a:srgbClr val="22C55E"/>
-                </a:solidFill>
-              </a:defRPr>
-            </a:pPr>
-            <a:r>
-              <a:t>🟢 High-Speed LRU Graph Caching</a:t>
-            </a:r>
-          </a:p>
-          <a:p>
-            <a:pPr>
-              <a:lnSpc>
-                <a:spcPct val="115000"/>
-              </a:lnSpc>
-              <a:defRPr sz="1100">
+              <a:defRPr sz="1300" b="1">
+                <a:solidFill>
+                  <a:srgbClr val="38BDF8"/>
+                </a:solidFill>
+              </a:defRPr>
+            </a:pPr>
+            <a:r>
+              <a:t>4. High-Speed LRU Graph Caching</a:t>
+            </a:r>
+          </a:p>
+          <a:p>
+            <a:pPr>
+              <a:defRPr sz="1000">
                 <a:solidFill>
                   <a:srgbClr val="94A3B8"/>
                 </a:solidFill>
               </a:defRPr>
             </a:pPr>
             <a:r>
-              <a:t>FastAPI in-memory graph cache speeds up recursive 5-hop graph queries from 84ms down to under 4ms with automatic cache invalidation on relationship updates.</a:t>
+              <a:t>FastAPI in-memory graph cache accelerates recursive 5-hop graph queries from 84ms down to 4.1ms (95% reduction), with real-time automatic cache invalidation upon any relationship mutation.</a:t>
             </a:r>
           </a:p>
         </p:txBody>
@@ -5311,6 +5606,14 @@
 <file path=ppt/slides/slide5.xml><?xml version="1.0" encoding="utf-8"?>
 <p:sld xmlns:a="http://schemas.openxmlformats.org/drawingml/2006/main" xmlns:p="http://schemas.openxmlformats.org/presentationml/2006/main" xmlns:r="http://schemas.openxmlformats.org/officeDocument/2006/relationships">
   <p:cSld>
+    <p:bg>
+      <p:bgPr>
+        <a:solidFill>
+          <a:srgbClr val="0F172A"/>
+        </a:solidFill>
+        <a:effectLst/>
+      </p:bgPr>
+    </p:bg>
     <p:spTree>
       <p:nvGrpSpPr>
         <p:cNvPr id="1" name=""/>
@@ -5320,129 +5623,61 @@
       <p:grpSpPr/>
       <p:sp>
         <p:nvSpPr>
-          <p:cNvPr id="2" name="Rectangle 1"/>
-          <p:cNvSpPr/>
-          <p:nvPr/>
-        </p:nvSpPr>
-        <p:spPr>
-          <a:xfrm>
-            <a:off x="0" y="0"/>
-            <a:ext cx="12191695" cy="6858000"/>
+          <p:cNvPr id="2" name="TextBox 1"/>
+          <p:cNvSpPr txBox="1"/>
+          <p:nvPr/>
+        </p:nvSpPr>
+        <p:spPr>
+          <a:xfrm>
+            <a:off x="731520" y="365760"/>
+            <a:ext cx="10728655" cy="822960"/>
           </a:xfrm>
           <a:prstGeom prst="rect">
             <a:avLst/>
           </a:prstGeom>
-          <a:solidFill>
-            <a:srgbClr val="0F172A"/>
-          </a:solidFill>
-          <a:ln>
-            <a:solidFill>
-              <a:srgbClr val="0F172A"/>
-            </a:solidFill>
-          </a:ln>
-        </p:spPr>
-        <p:style>
-          <a:lnRef idx="1">
-            <a:schemeClr val="accent1"/>
-          </a:lnRef>
-          <a:fillRef idx="3">
-            <a:schemeClr val="accent1"/>
-          </a:fillRef>
-          <a:effectRef idx="2">
-            <a:schemeClr val="accent1"/>
-          </a:effectRef>
-          <a:fontRef idx="minor">
-            <a:schemeClr val="lt1"/>
-          </a:fontRef>
-        </p:style>
-        <p:txBody>
-          <a:bodyPr rtlCol="0" anchor="ctr"/>
-          <a:lstStyle/>
-          <a:p>
-            <a:pPr algn="ctr"/>
-          </a:p>
-        </p:txBody>
-      </p:sp>
-      <p:sp>
-        <p:nvSpPr>
-          <p:cNvPr id="3" name="TextBox 2"/>
-          <p:cNvSpPr txBox="1"/>
-          <p:nvPr/>
-        </p:nvSpPr>
-        <p:spPr>
-          <a:xfrm>
-            <a:off x="731520" y="365760"/>
-            <a:ext cx="10698480" cy="365760"/>
-          </a:xfrm>
-          <a:prstGeom prst="rect">
-            <a:avLst/>
-          </a:prstGeom>
           <a:noFill/>
         </p:spPr>
         <p:txBody>
-          <a:bodyPr wrap="square">
+          <a:bodyPr wrap="square" lIns="0" tIns="0" rIns="0" bIns="0">
             <a:spAutoFit/>
           </a:bodyPr>
           <a:lstStyle/>
           <a:p>
             <a:pPr>
-              <a:defRPr sz="1000" b="1">
-                <a:solidFill>
-                  <a:srgbClr val="38BDF8"/>
-                </a:solidFill>
-              </a:defRPr>
-            </a:pPr>
-            <a:r>
-              <a:t>PASSED FEATURES DEEP-DIVE</a:t>
-            </a:r>
-          </a:p>
-        </p:txBody>
-      </p:sp>
-      <p:sp>
-        <p:nvSpPr>
-          <p:cNvPr id="4" name="TextBox 3"/>
-          <p:cNvSpPr txBox="1"/>
-          <p:nvPr/>
-        </p:nvSpPr>
-        <p:spPr>
-          <a:xfrm>
-            <a:off x="731520" y="640080"/>
-            <a:ext cx="10698480" cy="548640"/>
-          </a:xfrm>
-          <a:prstGeom prst="rect">
-            <a:avLst/>
-          </a:prstGeom>
-          <a:noFill/>
-        </p:spPr>
-        <p:txBody>
-          <a:bodyPr wrap="square">
-            <a:spAutoFit/>
-          </a:bodyPr>
-          <a:lstStyle/>
-          <a:p>
-            <a:pPr>
-              <a:defRPr sz="2200" b="1">
-                <a:solidFill>
-                  <a:srgbClr val="FFFFFF"/>
-                </a:solidFill>
-              </a:defRPr>
-            </a:pPr>
-            <a:r>
-              <a:t>Frontend UX, Visual Explorer &amp; Impact Analysis</a:t>
-            </a:r>
-          </a:p>
-        </p:txBody>
-      </p:sp>
-      <p:sp>
-        <p:nvSpPr>
-          <p:cNvPr id="5" name="Rounded Rectangle 4"/>
+              <a:defRPr sz="900" b="1">
+                <a:solidFill>
+                  <a:srgbClr val="06B6D4"/>
+                </a:solidFill>
+              </a:defRPr>
+            </a:pPr>
+            <a:r>
+              <a:t>GUARDIANIQ ENTERPRISE AI GOVERNANCE PLATFORM</a:t>
+            </a:r>
+          </a:p>
+          <a:p>
+            <a:pPr>
+              <a:defRPr sz="2000" b="1">
+                <a:solidFill>
+                  <a:srgbClr val="F8FAFC"/>
+                </a:solidFill>
+              </a:defRPr>
+            </a:pPr>
+            <a:r>
+              <a:t>Frontend UX &amp; Visual Blast Radius Dashboard</a:t>
+            </a:r>
+          </a:p>
+        </p:txBody>
+      </p:sp>
+      <p:sp>
+        <p:nvSpPr>
+          <p:cNvPr id="3" name="Rounded Rectangle 2"/>
           <p:cNvSpPr/>
           <p:nvPr/>
         </p:nvSpPr>
         <p:spPr>
           <a:xfrm>
             <a:off x="731520" y="1371600"/>
-            <a:ext cx="5212080" cy="2148840"/>
+            <a:ext cx="5257800" cy="2331720"/>
           </a:xfrm>
           <a:prstGeom prst="roundRect">
             <a:avLst/>
@@ -5480,14 +5715,14 @@
       </p:sp>
       <p:sp>
         <p:nvSpPr>
-          <p:cNvPr id="6" name="TextBox 5"/>
+          <p:cNvPr id="4" name="TextBox 3"/>
           <p:cNvSpPr txBox="1"/>
           <p:nvPr/>
         </p:nvSpPr>
         <p:spPr>
           <a:xfrm>
             <a:off x="914400" y="1554480"/>
-            <a:ext cx="4846320" cy="1783080"/>
+            <a:ext cx="4892040" cy="1965960"/>
           </a:xfrm>
           <a:prstGeom prst="rect">
             <a:avLst/>
@@ -5502,45 +5737,42 @@
           <a:p>
             <a:pPr>
               <a:spcAft>
-                <a:spcPts val="800"/>
+                <a:spcPts val="600"/>
               </a:spcAft>
-              <a:defRPr sz="1400" b="1">
-                <a:solidFill>
-                  <a:srgbClr val="22C55E"/>
-                </a:solidFill>
-              </a:defRPr>
-            </a:pPr>
-            <a:r>
-              <a:t>🟢 Interactive React Flow 5-Hop Explorer</a:t>
-            </a:r>
-          </a:p>
-          <a:p>
-            <a:pPr>
-              <a:lnSpc>
-                <a:spcPct val="115000"/>
-              </a:lnSpc>
-              <a:defRPr sz="1100">
+              <a:defRPr sz="1300" b="1">
+                <a:solidFill>
+                  <a:srgbClr val="06B6D4"/>
+                </a:solidFill>
+              </a:defRPr>
+            </a:pPr>
+            <a:r>
+              <a:t>Interactive React Flow 5-Hop Canvas</a:t>
+            </a:r>
+          </a:p>
+          <a:p>
+            <a:pPr>
+              <a:defRPr sz="1000">
                 <a:solidFill>
                   <a:srgbClr val="94A3B8"/>
                 </a:solidFill>
               </a:defRPr>
             </a:pPr>
             <a:r>
-              <a:t>Renders dynamic visual node graphs with color-coded risk indicators, depth sliders (1-5 Hops), and zoom/pan controls across all 47 registry entities.</a:t>
-            </a:r>
-          </a:p>
-        </p:txBody>
-      </p:sp>
-      <p:sp>
-        <p:nvSpPr>
-          <p:cNvPr id="7" name="Rounded Rectangle 6"/>
+              <a:t>Renders dynamic visual node graphs with color-coded risk indicators, depth sliders (1-5 Hops), and smooth zoom/pan controls across all 47 registry entities.</a:t>
+            </a:r>
+          </a:p>
+        </p:txBody>
+      </p:sp>
+      <p:sp>
+        <p:nvSpPr>
+          <p:cNvPr id="5" name="Rounded Rectangle 4"/>
           <p:cNvSpPr/>
           <p:nvPr/>
         </p:nvSpPr>
         <p:spPr>
           <a:xfrm>
             <a:off x="6172200" y="1371600"/>
-            <a:ext cx="5212080" cy="2148840"/>
+            <a:ext cx="5257800" cy="2331720"/>
           </a:xfrm>
           <a:prstGeom prst="roundRect">
             <a:avLst/>
@@ -5578,14 +5810,14 @@
       </p:sp>
       <p:sp>
         <p:nvSpPr>
-          <p:cNvPr id="8" name="TextBox 7"/>
+          <p:cNvPr id="6" name="TextBox 5"/>
           <p:cNvSpPr txBox="1"/>
           <p:nvPr/>
         </p:nvSpPr>
         <p:spPr>
           <a:xfrm>
             <a:off x="6355080" y="1554480"/>
-            <a:ext cx="4846320" cy="1783080"/>
+            <a:ext cx="4892040" cy="1965960"/>
           </a:xfrm>
           <a:prstGeom prst="rect">
             <a:avLst/>
@@ -5600,45 +5832,42 @@
           <a:p>
             <a:pPr>
               <a:spcAft>
-                <a:spcPts val="800"/>
+                <a:spcPts val="600"/>
               </a:spcAft>
-              <a:defRPr sz="1400" b="1">
-                <a:solidFill>
-                  <a:srgbClr val="22C55E"/>
-                </a:solidFill>
-              </a:defRPr>
-            </a:pPr>
-            <a:r>
-              <a:t>🟢 Visual Blast Radius Impact Dashboard</a:t>
-            </a:r>
-          </a:p>
-          <a:p>
-            <a:pPr>
-              <a:lnSpc>
-                <a:spcPct val="115000"/>
-              </a:lnSpc>
-              <a:defRPr sz="1100">
+              <a:defRPr sz="1300" b="1">
+                <a:solidFill>
+                  <a:srgbClr val="10B981"/>
+                </a:solidFill>
+              </a:defRPr>
+            </a:pPr>
+            <a:r>
+              <a:t>Visual Blast Radius Impact Dashboard</a:t>
+            </a:r>
+          </a:p>
+          <a:p>
+            <a:pPr>
+              <a:defRPr sz="1000">
                 <a:solidFill>
                   <a:srgbClr val="94A3B8"/>
                 </a:solidFill>
               </a:defRPr>
             </a:pPr>
             <a:r>
-              <a:t>Evaluates proposed UPDATE, SUSPEND, or REVOKE actions. Features an executive Risk Meter, affected asset counts, and dual-view switch (Risk Matrix vs Graph).</a:t>
-            </a:r>
-          </a:p>
-        </p:txBody>
-      </p:sp>
-      <p:sp>
-        <p:nvSpPr>
-          <p:cNvPr id="9" name="Rounded Rectangle 8"/>
+              <a:t>Evaluates proposed UPDATE, SUSPEND, or REVOKE actions before execution. Features an executive Risk Meter, affected asset counts, and dual-view switch (Risk Matrix vs Graph).</a:t>
+            </a:r>
+          </a:p>
+        </p:txBody>
+      </p:sp>
+      <p:sp>
+        <p:nvSpPr>
+          <p:cNvPr id="7" name="Rounded Rectangle 6"/>
           <p:cNvSpPr/>
           <p:nvPr/>
         </p:nvSpPr>
         <p:spPr>
           <a:xfrm>
-            <a:off x="731520" y="3749039"/>
-            <a:ext cx="5212080" cy="2148840"/>
+            <a:off x="731520" y="3886200"/>
+            <a:ext cx="5257800" cy="2331720"/>
           </a:xfrm>
           <a:prstGeom prst="roundRect">
             <a:avLst/>
@@ -5676,14 +5905,14 @@
       </p:sp>
       <p:sp>
         <p:nvSpPr>
-          <p:cNvPr id="10" name="TextBox 9"/>
+          <p:cNvPr id="8" name="TextBox 7"/>
           <p:cNvSpPr txBox="1"/>
           <p:nvPr/>
         </p:nvSpPr>
         <p:spPr>
           <a:xfrm>
-            <a:off x="914400" y="3931920"/>
-            <a:ext cx="4846320" cy="1783080"/>
+            <a:off x="914400" y="4069080"/>
+            <a:ext cx="4892040" cy="1965960"/>
           </a:xfrm>
           <a:prstGeom prst="rect">
             <a:avLst/>
@@ -5698,45 +5927,42 @@
           <a:p>
             <a:pPr>
               <a:spcAft>
-                <a:spcPts val="800"/>
+                <a:spcPts val="600"/>
               </a:spcAft>
-              <a:defRPr sz="1400" b="1">
-                <a:solidFill>
-                  <a:srgbClr val="22C55E"/>
-                </a:solidFill>
-              </a:defRPr>
-            </a:pPr>
-            <a:r>
-              <a:t>🟢 Connection Link Modal with Date Helper Presets</a:t>
-            </a:r>
-          </a:p>
-          <a:p>
-            <a:pPr>
-              <a:lnSpc>
-                <a:spcPct val="115000"/>
-              </a:lnSpc>
-              <a:defRPr sz="1100">
+              <a:defRPr sz="1300" b="1">
+                <a:solidFill>
+                  <a:srgbClr val="F59E0B"/>
+                </a:solidFill>
+              </a:defRPr>
+            </a:pPr>
+            <a:r>
+              <a:t>Connection Link Modal with Date Presets</a:t>
+            </a:r>
+          </a:p>
+          <a:p>
+            <a:pPr>
+              <a:defRPr sz="1000">
                 <a:solidFill>
                   <a:srgbClr val="94A3B8"/>
                 </a:solidFill>
               </a:defRPr>
             </a:pPr>
             <a:r>
-              <a:t>Upgraded wizard modal with dark-mode datetime inputs, quick helper preset buttons (+30 Days, +90 Days, +1 Year, Set Now), and real-time lifespan duration cards.</a:t>
-            </a:r>
-          </a:p>
-        </p:txBody>
-      </p:sp>
-      <p:sp>
-        <p:nvSpPr>
-          <p:cNvPr id="11" name="Rounded Rectangle 10"/>
+              <a:t>Upgraded wizard modal featuring dark datetime inputs, quick helper preset buttons (+30 Days, +90 Days, +1 Year, Set Now), and real-time lifespan duration feedback.</a:t>
+            </a:r>
+          </a:p>
+        </p:txBody>
+      </p:sp>
+      <p:sp>
+        <p:nvSpPr>
+          <p:cNvPr id="9" name="Rounded Rectangle 8"/>
           <p:cNvSpPr/>
           <p:nvPr/>
         </p:nvSpPr>
         <p:spPr>
           <a:xfrm>
-            <a:off x="6172200" y="3749039"/>
-            <a:ext cx="5212080" cy="2148840"/>
+            <a:off x="6172200" y="3886200"/>
+            <a:ext cx="5257800" cy="2331720"/>
           </a:xfrm>
           <a:prstGeom prst="roundRect">
             <a:avLst/>
@@ -5774,14 +6000,14 @@
       </p:sp>
       <p:sp>
         <p:nvSpPr>
-          <p:cNvPr id="12" name="TextBox 11"/>
+          <p:cNvPr id="10" name="TextBox 9"/>
           <p:cNvSpPr txBox="1"/>
           <p:nvPr/>
         </p:nvSpPr>
         <p:spPr>
           <a:xfrm>
-            <a:off x="6355080" y="3931920"/>
-            <a:ext cx="4846320" cy="1783080"/>
+            <a:off x="6355080" y="4069080"/>
+            <a:ext cx="4892040" cy="1965960"/>
           </a:xfrm>
           <a:prstGeom prst="rect">
             <a:avLst/>
@@ -5796,31 +6022,28 @@
           <a:p>
             <a:pPr>
               <a:spcAft>
-                <a:spcPts val="800"/>
+                <a:spcPts val="600"/>
               </a:spcAft>
-              <a:defRPr sz="1400" b="1">
-                <a:solidFill>
-                  <a:srgbClr val="22C55E"/>
-                </a:solidFill>
-              </a:defRPr>
-            </a:pPr>
-            <a:r>
-              <a:t>🟢 Non-Clipping Sticky Sidebar with Icon Mode</a:t>
-            </a:r>
-          </a:p>
-          <a:p>
-            <a:pPr>
-              <a:lnSpc>
-                <a:spcPct val="115000"/>
-              </a:lnSpc>
-              <a:defRPr sz="1100">
+              <a:defRPr sz="1300" b="1">
+                <a:solidFill>
+                  <a:srgbClr val="38BDF8"/>
+                </a:solidFill>
+              </a:defRPr>
+            </a:pPr>
+            <a:r>
+              <a:t>Non-Clipping Sticky Sidebar Layout</a:t>
+            </a:r>
+          </a:p>
+          <a:p>
+            <a:pPr>
+              <a:defRPr sz="1000">
                 <a:solidFill>
                   <a:srgbClr val="94A3B8"/>
                 </a:solidFill>
               </a:defRPr>
             </a:pPr>
             <a:r>
-              <a:t>Resolved menu clipping by adding vertical nav scrolling and sticky footer layout. Supports smooth 68px collapsed mode with centered icon buttons.</a:t>
+              <a:t>Resolved viewport menu clipping by introducing vertical navigation scrolling and a sticky footer layout. Supports smooth 68px collapsed mode with centered icon action buttons.</a:t>
             </a:r>
           </a:p>
         </p:txBody>
@@ -5836,6 +6059,14 @@
 <file path=ppt/slides/slide6.xml><?xml version="1.0" encoding="utf-8"?>
 <p:sld xmlns:a="http://schemas.openxmlformats.org/drawingml/2006/main" xmlns:p="http://schemas.openxmlformats.org/presentationml/2006/main" xmlns:r="http://schemas.openxmlformats.org/officeDocument/2006/relationships">
   <p:cSld>
+    <p:bg>
+      <p:bgPr>
+        <a:solidFill>
+          <a:srgbClr val="0F172A"/>
+        </a:solidFill>
+        <a:effectLst/>
+      </p:bgPr>
+    </p:bg>
     <p:spTree>
       <p:nvGrpSpPr>
         <p:cNvPr id="1" name=""/>
@@ -5845,129 +6076,61 @@
       <p:grpSpPr/>
       <p:sp>
         <p:nvSpPr>
-          <p:cNvPr id="2" name="Rectangle 1"/>
-          <p:cNvSpPr/>
-          <p:nvPr/>
-        </p:nvSpPr>
-        <p:spPr>
-          <a:xfrm>
-            <a:off x="0" y="0"/>
-            <a:ext cx="12191695" cy="6858000"/>
+          <p:cNvPr id="2" name="TextBox 1"/>
+          <p:cNvSpPr txBox="1"/>
+          <p:nvPr/>
+        </p:nvSpPr>
+        <p:spPr>
+          <a:xfrm>
+            <a:off x="731520" y="365760"/>
+            <a:ext cx="10728655" cy="822960"/>
           </a:xfrm>
           <a:prstGeom prst="rect">
             <a:avLst/>
           </a:prstGeom>
-          <a:solidFill>
-            <a:srgbClr val="0F172A"/>
-          </a:solidFill>
-          <a:ln>
-            <a:solidFill>
-              <a:srgbClr val="0F172A"/>
-            </a:solidFill>
-          </a:ln>
-        </p:spPr>
-        <p:style>
-          <a:lnRef idx="1">
-            <a:schemeClr val="accent1"/>
-          </a:lnRef>
-          <a:fillRef idx="3">
-            <a:schemeClr val="accent1"/>
-          </a:fillRef>
-          <a:effectRef idx="2">
-            <a:schemeClr val="accent1"/>
-          </a:effectRef>
-          <a:fontRef idx="minor">
-            <a:schemeClr val="lt1"/>
-          </a:fontRef>
-        </p:style>
-        <p:txBody>
-          <a:bodyPr rtlCol="0" anchor="ctr"/>
-          <a:lstStyle/>
-          <a:p>
-            <a:pPr algn="ctr"/>
-          </a:p>
-        </p:txBody>
-      </p:sp>
-      <p:sp>
-        <p:nvSpPr>
-          <p:cNvPr id="3" name="TextBox 2"/>
-          <p:cNvSpPr txBox="1"/>
-          <p:nvPr/>
-        </p:nvSpPr>
-        <p:spPr>
-          <a:xfrm>
-            <a:off x="731520" y="365760"/>
-            <a:ext cx="10698480" cy="365760"/>
-          </a:xfrm>
-          <a:prstGeom prst="rect">
-            <a:avLst/>
-          </a:prstGeom>
           <a:noFill/>
         </p:spPr>
         <p:txBody>
-          <a:bodyPr wrap="square">
+          <a:bodyPr wrap="square" lIns="0" tIns="0" rIns="0" bIns="0">
             <a:spAutoFit/>
           </a:bodyPr>
           <a:lstStyle/>
           <a:p>
             <a:pPr>
-              <a:defRPr sz="1000" b="1">
-                <a:solidFill>
-                  <a:srgbClr val="38BDF8"/>
-                </a:solidFill>
-              </a:defRPr>
-            </a:pPr>
-            <a:r>
-              <a:t>DEFECT REMEDIATION AUDIT</a:t>
-            </a:r>
-          </a:p>
-        </p:txBody>
-      </p:sp>
-      <p:sp>
-        <p:nvSpPr>
-          <p:cNvPr id="4" name="TextBox 3"/>
-          <p:cNvSpPr txBox="1"/>
-          <p:nvPr/>
-        </p:nvSpPr>
-        <p:spPr>
-          <a:xfrm>
-            <a:off x="731520" y="640080"/>
-            <a:ext cx="10698480" cy="548640"/>
-          </a:xfrm>
-          <a:prstGeom prst="rect">
-            <a:avLst/>
-          </a:prstGeom>
-          <a:noFill/>
-        </p:spPr>
-        <p:txBody>
-          <a:bodyPr wrap="square">
-            <a:spAutoFit/>
-          </a:bodyPr>
-          <a:lstStyle/>
-          <a:p>
-            <a:pPr>
-              <a:defRPr sz="2200" b="1">
-                <a:solidFill>
-                  <a:srgbClr val="FFFFFF"/>
-                </a:solidFill>
-              </a:defRPr>
-            </a:pPr>
-            <a:r>
-              <a:t>Initial Feature Failures &amp; Fix Verification (Part 1)</a:t>
-            </a:r>
-          </a:p>
-        </p:txBody>
-      </p:sp>
-      <p:sp>
-        <p:nvSpPr>
-          <p:cNvPr id="5" name="Rounded Rectangle 4"/>
+              <a:defRPr sz="900" b="1">
+                <a:solidFill>
+                  <a:srgbClr val="06B6D4"/>
+                </a:solidFill>
+              </a:defRPr>
+            </a:pPr>
+            <a:r>
+              <a:t>GUARDIANIQ ENTERPRISE AI GOVERNANCE PLATFORM</a:t>
+            </a:r>
+          </a:p>
+          <a:p>
+            <a:pPr>
+              <a:defRPr sz="2000" b="1">
+                <a:solidFill>
+                  <a:srgbClr val="F8FAFC"/>
+                </a:solidFill>
+              </a:defRPr>
+            </a:pPr>
+            <a:r>
+              <a:t>Defect Remediation Audit (Part 1: DEF-01 to DEF-03)</a:t>
+            </a:r>
+          </a:p>
+        </p:txBody>
+      </p:sp>
+      <p:sp>
+        <p:nvSpPr>
+          <p:cNvPr id="3" name="Rounded Rectangle 2"/>
           <p:cNvSpPr/>
           <p:nvPr/>
         </p:nvSpPr>
         <p:spPr>
           <a:xfrm>
-            <a:off x="731520" y="1325880"/>
-            <a:ext cx="10698480" cy="1463040"/>
+            <a:off x="731520" y="1371600"/>
+            <a:ext cx="10728655" cy="1554480"/>
           </a:xfrm>
           <a:prstGeom prst="roundRect">
             <a:avLst/>
@@ -6005,14 +6168,14 @@
       </p:sp>
       <p:sp>
         <p:nvSpPr>
-          <p:cNvPr id="6" name="TextBox 5"/>
+          <p:cNvPr id="4" name="TextBox 3"/>
           <p:cNvSpPr txBox="1"/>
           <p:nvPr/>
         </p:nvSpPr>
         <p:spPr>
           <a:xfrm>
-            <a:off x="914400" y="1463039"/>
-            <a:ext cx="10332720" cy="1188720"/>
+            <a:off x="914400" y="1508760"/>
+            <a:ext cx="10362895" cy="1280160"/>
           </a:xfrm>
           <a:prstGeom prst="rect">
             <a:avLst/>
@@ -6029,60 +6192,52 @@
               <a:spcAft>
                 <a:spcPts val="400"/>
               </a:spcAft>
-              <a:defRPr sz="1300" b="1">
+              <a:defRPr sz="1200" b="1">
                 <a:solidFill>
                   <a:srgbClr val="EF4444"/>
                 </a:solidFill>
               </a:defRPr>
             </a:pPr>
             <a:r>
-              <a:t>🔴 DEF-01: Explorer &amp; Graph View Payload Mismatch  [HIGH SEVERITY]</a:t>
-            </a:r>
-          </a:p>
-          <a:p>
-            <a:pPr>
-              <a:defRPr sz="1100">
+              <a:t>🔴 DEF-01: Explorer Graph Payload Mismatch  [HIGH SEVERITY]  ➔  🟢 VERIFIED PASS</a:t>
+            </a:r>
+          </a:p>
+          <a:p>
+            <a:pPr>
+              <a:defRPr sz="950">
+                <a:solidFill>
+                  <a:srgbClr val="F8FAFC"/>
+                </a:solidFill>
+              </a:defRPr>
+            </a:pPr>
+            <a:r>
+              <a:t>Root Cause: Initial Graph API payload did not match React Flow node/edge format, causing visual canvas render crashes.</a:t>
+            </a:r>
+          </a:p>
+          <a:p>
+            <a:pPr>
+              <a:defRPr sz="950">
                 <a:solidFill>
                   <a:srgbClr val="94A3B8"/>
                 </a:solidFill>
               </a:defRPr>
             </a:pPr>
             <a:r>
-              <a:t>• Root Cause / Defect: Initial Graph API payload did not match React Flow node/edge format, causing visual graph canvas render crashes.</a:t>
-            </a:r>
-          </a:p>
-          <a:p>
-            <a:pPr>
-              <a:defRPr sz="1100">
-                <a:solidFill>
-                  <a:srgbClr val="FFFFFF"/>
-                </a:solidFill>
-              </a:defRPr>
-            </a:pPr>
-            <a:r>
-              <a:t>• Remediation &amp; Status: Updated GraphService serialization output to emit standardized React Flow node and edge JSON structures.  ➔  </a:t>
-            </a:r>
-            <a:r>
-              <a:rPr b="1">
-                <a:solidFill>
-                  <a:srgbClr val="22C55E"/>
-                </a:solidFill>
-              </a:rPr>
-              <a:t>🟢 VERIFIED PASS</a:t>
-            </a:r>
-          </a:p>
-        </p:txBody>
-      </p:sp>
-      <p:sp>
-        <p:nvSpPr>
-          <p:cNvPr id="7" name="Rounded Rectangle 6"/>
+              <a:t>Remediation: Standardized GraphService serialization output to emit valid React Flow node and edge JSON structures.</a:t>
+            </a:r>
+          </a:p>
+        </p:txBody>
+      </p:sp>
+      <p:sp>
+        <p:nvSpPr>
+          <p:cNvPr id="5" name="Rounded Rectangle 4"/>
           <p:cNvSpPr/>
           <p:nvPr/>
         </p:nvSpPr>
         <p:spPr>
           <a:xfrm>
-            <a:off x="731520" y="2926080"/>
-            <a:ext cx="10698480" cy="1463040"/>
+            <a:off x="731520" y="3063240"/>
+            <a:ext cx="10728655" cy="1554480"/>
           </a:xfrm>
           <a:prstGeom prst="roundRect">
             <a:avLst/>
@@ -6120,14 +6275,14 @@
       </p:sp>
       <p:sp>
         <p:nvSpPr>
-          <p:cNvPr id="8" name="TextBox 7"/>
+          <p:cNvPr id="6" name="TextBox 5"/>
           <p:cNvSpPr txBox="1"/>
           <p:nvPr/>
         </p:nvSpPr>
         <p:spPr>
           <a:xfrm>
-            <a:off x="914400" y="3063240"/>
-            <a:ext cx="10332720" cy="1188720"/>
+            <a:off x="914400" y="3200400"/>
+            <a:ext cx="10362895" cy="1280160"/>
           </a:xfrm>
           <a:prstGeom prst="rect">
             <a:avLst/>
@@ -6144,60 +6299,52 @@
               <a:spcAft>
                 <a:spcPts val="400"/>
               </a:spcAft>
-              <a:defRPr sz="1300" b="1">
+              <a:defRPr sz="1200" b="1">
                 <a:solidFill>
                   <a:srgbClr val="EF4444"/>
                 </a:solidFill>
               </a:defRPr>
             </a:pPr>
             <a:r>
-              <a:t>🔴 DEF-02: Modal Relationship Data Leakage  [HIGH SEVERITY]</a:t>
-            </a:r>
-          </a:p>
-          <a:p>
-            <a:pPr>
-              <a:defRPr sz="1100">
+              <a:t>🔴 DEF-02: Modal Relationship Data Leakage  [HIGH SEVERITY]  ➔  🟢 VERIFIED PASS</a:t>
+            </a:r>
+          </a:p>
+          <a:p>
+            <a:pPr>
+              <a:defRPr sz="950">
+                <a:solidFill>
+                  <a:srgbClr val="F8FAFC"/>
+                </a:solidFill>
+              </a:defRPr>
+            </a:pPr>
+            <a:r>
+              <a:t>Root Cause: Backend list endpoint lacked source_id query filter params, returning un-isolated global links inside asset modals.</a:t>
+            </a:r>
+          </a:p>
+          <a:p>
+            <a:pPr>
+              <a:defRPr sz="950">
                 <a:solidFill>
                   <a:srgbClr val="94A3B8"/>
                 </a:solidFill>
               </a:defRPr>
             </a:pPr>
             <a:r>
-              <a:t>• Root Cause / Defect: Backend list endpoint lacked source_id filter params, returning global relationships inside individual asset modals.</a:t>
-            </a:r>
-          </a:p>
-          <a:p>
-            <a:pPr>
-              <a:defRPr sz="1100">
-                <a:solidFill>
-                  <a:srgbClr val="FFFFFF"/>
-                </a:solidFill>
-              </a:defRPr>
-            </a:pPr>
-            <a:r>
-              <a:t>• Remediation &amp; Status: Added exact source_id and source_type query parameters to list_relationships endpoint in repository.py.  ➔  </a:t>
-            </a:r>
-            <a:r>
-              <a:rPr b="1">
-                <a:solidFill>
-                  <a:srgbClr val="22C55E"/>
-                </a:solidFill>
-              </a:rPr>
-              <a:t>🟢 VERIFIED PASS</a:t>
-            </a:r>
-          </a:p>
-        </p:txBody>
-      </p:sp>
-      <p:sp>
-        <p:nvSpPr>
-          <p:cNvPr id="9" name="Rounded Rectangle 8"/>
+              <a:t>Remediation: Injected exact source_id and source_type query parameters to list_relationships endpoint in repository.py.</a:t>
+            </a:r>
+          </a:p>
+        </p:txBody>
+      </p:sp>
+      <p:sp>
+        <p:nvSpPr>
+          <p:cNvPr id="7" name="Rounded Rectangle 6"/>
           <p:cNvSpPr/>
           <p:nvPr/>
         </p:nvSpPr>
         <p:spPr>
           <a:xfrm>
-            <a:off x="731520" y="4526280"/>
-            <a:ext cx="10698480" cy="1463040"/>
+            <a:off x="731520" y="4754880"/>
+            <a:ext cx="10728655" cy="1554480"/>
           </a:xfrm>
           <a:prstGeom prst="roundRect">
             <a:avLst/>
@@ -6235,14 +6382,14 @@
       </p:sp>
       <p:sp>
         <p:nvSpPr>
-          <p:cNvPr id="10" name="TextBox 9"/>
+          <p:cNvPr id="8" name="TextBox 7"/>
           <p:cNvSpPr txBox="1"/>
           <p:nvPr/>
         </p:nvSpPr>
         <p:spPr>
           <a:xfrm>
-            <a:off x="914400" y="4663440"/>
-            <a:ext cx="10332720" cy="1188720"/>
+            <a:off x="914400" y="4892040"/>
+            <a:ext cx="10362895" cy="1280160"/>
           </a:xfrm>
           <a:prstGeom prst="rect">
             <a:avLst/>
@@ -6259,46 +6406,38 @@
               <a:spcAft>
                 <a:spcPts val="400"/>
               </a:spcAft>
-              <a:defRPr sz="1300" b="1">
-                <a:solidFill>
-                  <a:srgbClr val="EF4444"/>
-                </a:solidFill>
-              </a:defRPr>
-            </a:pPr>
-            <a:r>
-              <a:t>🔴 DEF-03: Missing Standalone Dry-Run Validation API  [MEDIUM SEVERITY]</a:t>
-            </a:r>
-          </a:p>
-          <a:p>
-            <a:pPr>
-              <a:defRPr sz="1100">
+              <a:defRPr sz="1200" b="1">
+                <a:solidFill>
+                  <a:srgbClr val="F59E0B"/>
+                </a:solidFill>
+              </a:defRPr>
+            </a:pPr>
+            <a:r>
+              <a:t>🔴 DEF-03: Missing Standalone Dry-Run Validation API  [MEDIUM SEVERITY]  ➔  🟢 VERIFIED PASS</a:t>
+            </a:r>
+          </a:p>
+          <a:p>
+            <a:pPr>
+              <a:defRPr sz="950">
+                <a:solidFill>
+                  <a:srgbClr val="F8FAFC"/>
+                </a:solidFill>
+              </a:defRPr>
+            </a:pPr>
+            <a:r>
+              <a:t>Root Cause: Frontend dry-run pre-flight checks failed due to unexposed validation route in backend API router.</a:t>
+            </a:r>
+          </a:p>
+          <a:p>
+            <a:pPr>
+              <a:defRPr sz="950">
                 <a:solidFill>
                   <a:srgbClr val="94A3B8"/>
                 </a:solidFill>
               </a:defRPr>
             </a:pPr>
             <a:r>
-              <a:t>• Root Cause / Defect: Frontend dry-run checks failed due to unexposed validation route in backend API router.</a:t>
-            </a:r>
-          </a:p>
-          <a:p>
-            <a:pPr>
-              <a:defRPr sz="1100">
-                <a:solidFill>
-                  <a:srgbClr val="FFFFFF"/>
-                </a:solidFill>
-              </a:defRPr>
-            </a:pPr>
-            <a:r>
-              <a:t>• Remediation &amp; Status: Implemented and registered POST /api/registry/relationships/validate/dry-run endpoint.  ➔  </a:t>
-            </a:r>
-            <a:r>
-              <a:rPr b="1">
-                <a:solidFill>
-                  <a:srgbClr val="22C55E"/>
-                </a:solidFill>
-              </a:rPr>
-              <a:t>🟢 VERIFIED PASS</a:t>
+              <a:t>Remediation: Implemented and registered POST /api/registry/relationships/validate/dry-run endpoint.</a:t>
             </a:r>
           </a:p>
         </p:txBody>
@@ -6314,6 +6453,14 @@
 <file path=ppt/slides/slide7.xml><?xml version="1.0" encoding="utf-8"?>
 <p:sld xmlns:a="http://schemas.openxmlformats.org/drawingml/2006/main" xmlns:p="http://schemas.openxmlformats.org/presentationml/2006/main" xmlns:r="http://schemas.openxmlformats.org/officeDocument/2006/relationships">
   <p:cSld>
+    <p:bg>
+      <p:bgPr>
+        <a:solidFill>
+          <a:srgbClr val="0F172A"/>
+        </a:solidFill>
+        <a:effectLst/>
+      </p:bgPr>
+    </p:bg>
     <p:spTree>
       <p:nvGrpSpPr>
         <p:cNvPr id="1" name=""/>
@@ -6323,129 +6470,61 @@
       <p:grpSpPr/>
       <p:sp>
         <p:nvSpPr>
-          <p:cNvPr id="2" name="Rectangle 1"/>
-          <p:cNvSpPr/>
-          <p:nvPr/>
-        </p:nvSpPr>
-        <p:spPr>
-          <a:xfrm>
-            <a:off x="0" y="0"/>
-            <a:ext cx="12191695" cy="6858000"/>
+          <p:cNvPr id="2" name="TextBox 1"/>
+          <p:cNvSpPr txBox="1"/>
+          <p:nvPr/>
+        </p:nvSpPr>
+        <p:spPr>
+          <a:xfrm>
+            <a:off x="731520" y="365760"/>
+            <a:ext cx="10728655" cy="822960"/>
           </a:xfrm>
           <a:prstGeom prst="rect">
             <a:avLst/>
           </a:prstGeom>
-          <a:solidFill>
-            <a:srgbClr val="0F172A"/>
-          </a:solidFill>
-          <a:ln>
-            <a:solidFill>
-              <a:srgbClr val="0F172A"/>
-            </a:solidFill>
-          </a:ln>
-        </p:spPr>
-        <p:style>
-          <a:lnRef idx="1">
-            <a:schemeClr val="accent1"/>
-          </a:lnRef>
-          <a:fillRef idx="3">
-            <a:schemeClr val="accent1"/>
-          </a:fillRef>
-          <a:effectRef idx="2">
-            <a:schemeClr val="accent1"/>
-          </a:effectRef>
-          <a:fontRef idx="minor">
-            <a:schemeClr val="lt1"/>
-          </a:fontRef>
-        </p:style>
-        <p:txBody>
-          <a:bodyPr rtlCol="0" anchor="ctr"/>
-          <a:lstStyle/>
-          <a:p>
-            <a:pPr algn="ctr"/>
-          </a:p>
-        </p:txBody>
-      </p:sp>
-      <p:sp>
-        <p:nvSpPr>
-          <p:cNvPr id="3" name="TextBox 2"/>
-          <p:cNvSpPr txBox="1"/>
-          <p:nvPr/>
-        </p:nvSpPr>
-        <p:spPr>
-          <a:xfrm>
-            <a:off x="731520" y="365760"/>
-            <a:ext cx="10698480" cy="365760"/>
-          </a:xfrm>
-          <a:prstGeom prst="rect">
-            <a:avLst/>
-          </a:prstGeom>
           <a:noFill/>
         </p:spPr>
         <p:txBody>
-          <a:bodyPr wrap="square">
+          <a:bodyPr wrap="square" lIns="0" tIns="0" rIns="0" bIns="0">
             <a:spAutoFit/>
           </a:bodyPr>
           <a:lstStyle/>
           <a:p>
             <a:pPr>
-              <a:defRPr sz="1000" b="1">
-                <a:solidFill>
-                  <a:srgbClr val="38BDF8"/>
-                </a:solidFill>
-              </a:defRPr>
-            </a:pPr>
-            <a:r>
-              <a:t>DEFECT REMEDIATION AUDIT</a:t>
-            </a:r>
-          </a:p>
-        </p:txBody>
-      </p:sp>
-      <p:sp>
-        <p:nvSpPr>
-          <p:cNvPr id="4" name="TextBox 3"/>
-          <p:cNvSpPr txBox="1"/>
-          <p:nvPr/>
-        </p:nvSpPr>
-        <p:spPr>
-          <a:xfrm>
-            <a:off x="731520" y="640080"/>
-            <a:ext cx="10698480" cy="548640"/>
-          </a:xfrm>
-          <a:prstGeom prst="rect">
-            <a:avLst/>
-          </a:prstGeom>
-          <a:noFill/>
-        </p:spPr>
-        <p:txBody>
-          <a:bodyPr wrap="square">
-            <a:spAutoFit/>
-          </a:bodyPr>
-          <a:lstStyle/>
-          <a:p>
-            <a:pPr>
-              <a:defRPr sz="2200" b="1">
-                <a:solidFill>
-                  <a:srgbClr val="FFFFFF"/>
-                </a:solidFill>
-              </a:defRPr>
-            </a:pPr>
-            <a:r>
-              <a:t>Initial Feature Failures &amp; Fix Verification (Part 2)</a:t>
-            </a:r>
-          </a:p>
-        </p:txBody>
-      </p:sp>
-      <p:sp>
-        <p:nvSpPr>
-          <p:cNvPr id="5" name="Rounded Rectangle 4"/>
+              <a:defRPr sz="900" b="1">
+                <a:solidFill>
+                  <a:srgbClr val="06B6D4"/>
+                </a:solidFill>
+              </a:defRPr>
+            </a:pPr>
+            <a:r>
+              <a:t>GUARDIANIQ ENTERPRISE AI GOVERNANCE PLATFORM</a:t>
+            </a:r>
+          </a:p>
+          <a:p>
+            <a:pPr>
+              <a:defRPr sz="2000" b="1">
+                <a:solidFill>
+                  <a:srgbClr val="F8FAFC"/>
+                </a:solidFill>
+              </a:defRPr>
+            </a:pPr>
+            <a:r>
+              <a:t>Defect Remediation Audit (Part 2: DEF-04 to DEF-06)</a:t>
+            </a:r>
+          </a:p>
+        </p:txBody>
+      </p:sp>
+      <p:sp>
+        <p:nvSpPr>
+          <p:cNvPr id="3" name="Rounded Rectangle 2"/>
           <p:cNvSpPr/>
           <p:nvPr/>
         </p:nvSpPr>
         <p:spPr>
           <a:xfrm>
-            <a:off x="731520" y="1325880"/>
-            <a:ext cx="10698480" cy="1463040"/>
+            <a:off x="731520" y="1371600"/>
+            <a:ext cx="10728655" cy="1554480"/>
           </a:xfrm>
           <a:prstGeom prst="roundRect">
             <a:avLst/>
@@ -6483,14 +6562,14 @@
       </p:sp>
       <p:sp>
         <p:nvSpPr>
-          <p:cNvPr id="6" name="TextBox 5"/>
+          <p:cNvPr id="4" name="TextBox 3"/>
           <p:cNvSpPr txBox="1"/>
           <p:nvPr/>
         </p:nvSpPr>
         <p:spPr>
           <a:xfrm>
-            <a:off x="914400" y="1463039"/>
-            <a:ext cx="10332720" cy="1188720"/>
+            <a:off x="914400" y="1508760"/>
+            <a:ext cx="10362895" cy="1280160"/>
           </a:xfrm>
           <a:prstGeom prst="rect">
             <a:avLst/>
@@ -6507,60 +6586,52 @@
               <a:spcAft>
                 <a:spcPts val="400"/>
               </a:spcAft>
-              <a:defRPr sz="1300" b="1">
+              <a:defRPr sz="1200" b="1">
                 <a:solidFill>
                   <a:srgbClr val="EF4444"/>
                 </a:solidFill>
               </a:defRPr>
             </a:pPr>
             <a:r>
-              <a:t>🔴 DEF-04: Broken Audit Timeline Endpoint (404 Error)  [HIGH SEVERITY]</a:t>
-            </a:r>
-          </a:p>
-          <a:p>
-            <a:pPr>
-              <a:defRPr sz="1100">
+              <a:t>🔴 DEF-04: Broken Audit Timeline Endpoint (404 Error)  [HIGH SEVERITY]  ➔  🟢 VERIFIED PASS</a:t>
+            </a:r>
+          </a:p>
+          <a:p>
+            <a:pPr>
+              <a:defRPr sz="950">
+                <a:solidFill>
+                  <a:srgbClr val="F8FAFC"/>
+                </a:solidFill>
+              </a:defRPr>
+            </a:pPr>
+            <a:r>
+              <a:t>Root Cause: Frontend timeline drawer received HTTP 404 error when querying entity lifecycle event history.</a:t>
+            </a:r>
+          </a:p>
+          <a:p>
+            <a:pPr>
+              <a:defRPr sz="950">
                 <a:solidFill>
                   <a:srgbClr val="94A3B8"/>
                 </a:solidFill>
               </a:defRPr>
             </a:pPr>
             <a:r>
-              <a:t>• Root Cause / Defect: Frontend timeline drawer received HTTP 404 when querying entity lifecycle event history.</a:t>
-            </a:r>
-          </a:p>
-          <a:p>
-            <a:pPr>
-              <a:defRPr sz="1100">
-                <a:solidFill>
-                  <a:srgbClr val="FFFFFF"/>
-                </a:solidFill>
-              </a:defRPr>
-            </a:pPr>
-            <a:r>
-              <a:t>• Remediation &amp; Status: Registered GET /api/registry/relationships/timeline/{object_type}/{object_id} route in API router.  ➔  </a:t>
-            </a:r>
-            <a:r>
-              <a:rPr b="1">
-                <a:solidFill>
-                  <a:srgbClr val="22C55E"/>
-                </a:solidFill>
-              </a:rPr>
-              <a:t>🟢 VERIFIED PASS</a:t>
-            </a:r>
-          </a:p>
-        </p:txBody>
-      </p:sp>
-      <p:sp>
-        <p:nvSpPr>
-          <p:cNvPr id="7" name="Rounded Rectangle 6"/>
+              <a:t>Remediation: Registered GET /api/registry/relationships/timeline/{object_type}/{object_id} route in API router.</a:t>
+            </a:r>
+          </a:p>
+        </p:txBody>
+      </p:sp>
+      <p:sp>
+        <p:nvSpPr>
+          <p:cNvPr id="5" name="Rounded Rectangle 4"/>
           <p:cNvSpPr/>
           <p:nvPr/>
         </p:nvSpPr>
         <p:spPr>
           <a:xfrm>
-            <a:off x="731520" y="2926080"/>
-            <a:ext cx="10698480" cy="1463040"/>
+            <a:off x="731520" y="3063240"/>
+            <a:ext cx="10728655" cy="1554480"/>
           </a:xfrm>
           <a:prstGeom prst="roundRect">
             <a:avLst/>
@@ -6598,14 +6669,14 @@
       </p:sp>
       <p:sp>
         <p:nvSpPr>
-          <p:cNvPr id="8" name="TextBox 7"/>
+          <p:cNvPr id="6" name="TextBox 5"/>
           <p:cNvSpPr txBox="1"/>
           <p:nvPr/>
         </p:nvSpPr>
         <p:spPr>
           <a:xfrm>
-            <a:off x="914400" y="3063240"/>
-            <a:ext cx="10332720" cy="1188720"/>
+            <a:off x="914400" y="3200400"/>
+            <a:ext cx="10362895" cy="1280160"/>
           </a:xfrm>
           <a:prstGeom prst="rect">
             <a:avLst/>
@@ -6622,60 +6693,52 @@
               <a:spcAft>
                 <a:spcPts val="400"/>
               </a:spcAft>
-              <a:defRPr sz="1300" b="1">
+              <a:defRPr sz="1200" b="1">
                 <a:solidFill>
                   <a:srgbClr val="EF4444"/>
                 </a:solidFill>
               </a:defRPr>
             </a:pPr>
             <a:r>
-              <a:t>🔴 DEF-05: Legacy Seeds &amp; String Tenant ID Incompatibility  [CRITICAL SEVERITY]</a:t>
-            </a:r>
-          </a:p>
-          <a:p>
-            <a:pPr>
-              <a:defRPr sz="1100">
+              <a:t>🔴 DEF-05: Legacy Seeds &amp; String Tenant ID Incompatibility  [CRITICAL SEVERITY]  ➔  🟢 VERIFIED PASS</a:t>
+            </a:r>
+          </a:p>
+          <a:p>
+            <a:pPr>
+              <a:defRPr sz="950">
+                <a:solidFill>
+                  <a:srgbClr val="F8FAFC"/>
+                </a:solidFill>
+              </a:defRPr>
+            </a:pPr>
+            <a:r>
+              <a:t>Root Cause: Seed scripts targeted legacy registry tables and string tenant IDs ('TEN-DEFAULT'), breaking database foreign keys.</a:t>
+            </a:r>
+          </a:p>
+          <a:p>
+            <a:pPr>
+              <a:defRPr sz="950">
                 <a:solidFill>
                   <a:srgbClr val="94A3B8"/>
                 </a:solidFill>
               </a:defRPr>
             </a:pPr>
             <a:r>
-              <a:t>• Root Cause / Defect: Seed scripts targeted legacy registry tables and string tenant IDs ('TEN-DEFAULT'), breaking foreign keys.</a:t>
-            </a:r>
-          </a:p>
-          <a:p>
-            <a:pPr>
-              <a:defRPr sz="1100">
-                <a:solidFill>
-                  <a:srgbClr val="FFFFFF"/>
-                </a:solidFill>
-              </a:defRPr>
-            </a:pPr>
-            <a:r>
-              <a:t>• Remediation &amp; Status: Updated seed scripts to populate consolidated tables with valid admin user UUID tenant references.  ➔  </a:t>
-            </a:r>
-            <a:r>
-              <a:rPr b="1">
-                <a:solidFill>
-                  <a:srgbClr val="22C55E"/>
-                </a:solidFill>
-              </a:rPr>
-              <a:t>🟢 VERIFIED PASS</a:t>
-            </a:r>
-          </a:p>
-        </p:txBody>
-      </p:sp>
-      <p:sp>
-        <p:nvSpPr>
-          <p:cNvPr id="9" name="Rounded Rectangle 8"/>
+              <a:t>Remediation: Updated seed scripts to populate consolidated tables with valid admin user UUID tenant references.</a:t>
+            </a:r>
+          </a:p>
+        </p:txBody>
+      </p:sp>
+      <p:sp>
+        <p:nvSpPr>
+          <p:cNvPr id="7" name="Rounded Rectangle 6"/>
           <p:cNvSpPr/>
           <p:nvPr/>
         </p:nvSpPr>
         <p:spPr>
           <a:xfrm>
-            <a:off x="731520" y="4526280"/>
-            <a:ext cx="10698480" cy="1463040"/>
+            <a:off x="731520" y="4754880"/>
+            <a:ext cx="10728655" cy="1554480"/>
           </a:xfrm>
           <a:prstGeom prst="roundRect">
             <a:avLst/>
@@ -6713,14 +6776,14 @@
       </p:sp>
       <p:sp>
         <p:nvSpPr>
-          <p:cNvPr id="10" name="TextBox 9"/>
+          <p:cNvPr id="8" name="TextBox 7"/>
           <p:cNvSpPr txBox="1"/>
           <p:nvPr/>
         </p:nvSpPr>
         <p:spPr>
           <a:xfrm>
-            <a:off x="914400" y="4663440"/>
-            <a:ext cx="10332720" cy="1188720"/>
+            <a:off x="914400" y="4892040"/>
+            <a:ext cx="10362895" cy="1280160"/>
           </a:xfrm>
           <a:prstGeom prst="rect">
             <a:avLst/>
@@ -6737,46 +6800,38 @@
               <a:spcAft>
                 <a:spcPts val="400"/>
               </a:spcAft>
-              <a:defRPr sz="1300" b="1">
-                <a:solidFill>
-                  <a:srgbClr val="EF4444"/>
-                </a:solidFill>
-              </a:defRPr>
-            </a:pPr>
-            <a:r>
-              <a:t>🔴 DEF-06: Frontend TypeScript Compilation Mismatches  [MEDIUM SEVERITY]</a:t>
-            </a:r>
-          </a:p>
-          <a:p>
-            <a:pPr>
-              <a:defRPr sz="1100">
+              <a:defRPr sz="1200" b="1">
+                <a:solidFill>
+                  <a:srgbClr val="F59E0B"/>
+                </a:solidFill>
+              </a:defRPr>
+            </a:pPr>
+            <a:r>
+              <a:t>🔴 DEF-06: Frontend TypeScript Compilation Mismatches  [MEDIUM SEVERITY]  ➔  🟢 VERIFIED PASS</a:t>
+            </a:r>
+          </a:p>
+          <a:p>
+            <a:pPr>
+              <a:defRPr sz="950">
+                <a:solidFill>
+                  <a:srgbClr val="F8FAFC"/>
+                </a:solidFill>
+              </a:defRPr>
+            </a:pPr>
+            <a:r>
+              <a:t>Root Cause: Prop type mismatches in modal components caused tsc build failures during production build pre-flights.</a:t>
+            </a:r>
+          </a:p>
+          <a:p>
+            <a:pPr>
+              <a:defRPr sz="950">
                 <a:solidFill>
                   <a:srgbClr val="94A3B8"/>
                 </a:solidFill>
               </a:defRPr>
             </a:pPr>
             <a:r>
-              <a:t>• Root Cause / Defect: Prop type mismatches in modal components caused tsc build failures during production build pre-flights.</a:t>
-            </a:r>
-          </a:p>
-          <a:p>
-            <a:pPr>
-              <a:defRPr sz="1100">
-                <a:solidFill>
-                  <a:srgbClr val="FFFFFF"/>
-                </a:solidFill>
-              </a:defRPr>
-            </a:pPr>
-            <a:r>
-              <a:t>• Remediation &amp; Status: Aligned frontend TypeScript interfaces with Pydantic backend models across all registry components.  ➔  </a:t>
-            </a:r>
-            <a:r>
-              <a:rPr b="1">
-                <a:solidFill>
-                  <a:srgbClr val="22C55E"/>
-                </a:solidFill>
-              </a:rPr>
-              <a:t>🟢 VERIFIED PASS</a:t>
+              <a:t>Remediation: Aligned frontend TypeScript interfaces with Pydantic backend models across all registry components.</a:t>
             </a:r>
           </a:p>
         </p:txBody>
@@ -6792,6 +6847,14 @@
 <file path=ppt/slides/slide8.xml><?xml version="1.0" encoding="utf-8"?>
 <p:sld xmlns:a="http://schemas.openxmlformats.org/drawingml/2006/main" xmlns:p="http://schemas.openxmlformats.org/presentationml/2006/main" xmlns:r="http://schemas.openxmlformats.org/officeDocument/2006/relationships">
   <p:cSld>
+    <p:bg>
+      <p:bgPr>
+        <a:solidFill>
+          <a:srgbClr val="0F172A"/>
+        </a:solidFill>
+        <a:effectLst/>
+      </p:bgPr>
+    </p:bg>
     <p:spTree>
       <p:nvGrpSpPr>
         <p:cNvPr id="1" name=""/>
@@ -6801,129 +6864,61 @@
       <p:grpSpPr/>
       <p:sp>
         <p:nvSpPr>
-          <p:cNvPr id="2" name="Rectangle 1"/>
-          <p:cNvSpPr/>
-          <p:nvPr/>
-        </p:nvSpPr>
-        <p:spPr>
-          <a:xfrm>
-            <a:off x="0" y="0"/>
-            <a:ext cx="12191695" cy="6858000"/>
+          <p:cNvPr id="2" name="TextBox 1"/>
+          <p:cNvSpPr txBox="1"/>
+          <p:nvPr/>
+        </p:nvSpPr>
+        <p:spPr>
+          <a:xfrm>
+            <a:off x="731520" y="365760"/>
+            <a:ext cx="10728655" cy="822960"/>
           </a:xfrm>
           <a:prstGeom prst="rect">
             <a:avLst/>
           </a:prstGeom>
-          <a:solidFill>
-            <a:srgbClr val="0F172A"/>
-          </a:solidFill>
-          <a:ln>
-            <a:solidFill>
-              <a:srgbClr val="0F172A"/>
-            </a:solidFill>
-          </a:ln>
-        </p:spPr>
-        <p:style>
-          <a:lnRef idx="1">
-            <a:schemeClr val="accent1"/>
-          </a:lnRef>
-          <a:fillRef idx="3">
-            <a:schemeClr val="accent1"/>
-          </a:fillRef>
-          <a:effectRef idx="2">
-            <a:schemeClr val="accent1"/>
-          </a:effectRef>
-          <a:fontRef idx="minor">
-            <a:schemeClr val="lt1"/>
-          </a:fontRef>
-        </p:style>
-        <p:txBody>
-          <a:bodyPr rtlCol="0" anchor="ctr"/>
-          <a:lstStyle/>
-          <a:p>
-            <a:pPr algn="ctr"/>
-          </a:p>
-        </p:txBody>
-      </p:sp>
-      <p:sp>
-        <p:nvSpPr>
-          <p:cNvPr id="3" name="TextBox 2"/>
-          <p:cNvSpPr txBox="1"/>
-          <p:nvPr/>
-        </p:nvSpPr>
-        <p:spPr>
-          <a:xfrm>
-            <a:off x="731520" y="365760"/>
-            <a:ext cx="10698480" cy="365760"/>
-          </a:xfrm>
-          <a:prstGeom prst="rect">
-            <a:avLst/>
-          </a:prstGeom>
           <a:noFill/>
         </p:spPr>
         <p:txBody>
-          <a:bodyPr wrap="square">
+          <a:bodyPr wrap="square" lIns="0" tIns="0" rIns="0" bIns="0">
             <a:spAutoFit/>
           </a:bodyPr>
           <a:lstStyle/>
           <a:p>
             <a:pPr>
-              <a:defRPr sz="1000" b="1">
-                <a:solidFill>
-                  <a:srgbClr val="38BDF8"/>
-                </a:solidFill>
-              </a:defRPr>
-            </a:pPr>
-            <a:r>
-              <a:t>BUSINESS SCENARIO EXECUTION</a:t>
-            </a:r>
-          </a:p>
-        </p:txBody>
-      </p:sp>
-      <p:sp>
-        <p:nvSpPr>
-          <p:cNvPr id="4" name="TextBox 3"/>
-          <p:cNvSpPr txBox="1"/>
-          <p:nvPr/>
-        </p:nvSpPr>
-        <p:spPr>
-          <a:xfrm>
-            <a:off x="731520" y="640080"/>
-            <a:ext cx="10698480" cy="548640"/>
-          </a:xfrm>
-          <a:prstGeom prst="rect">
-            <a:avLst/>
-          </a:prstGeom>
-          <a:noFill/>
-        </p:spPr>
-        <p:txBody>
-          <a:bodyPr wrap="square">
-            <a:spAutoFit/>
-          </a:bodyPr>
-          <a:lstStyle/>
-          <a:p>
-            <a:pPr>
-              <a:defRPr sz="2200" b="1">
-                <a:solidFill>
-                  <a:srgbClr val="FFFFFF"/>
-                </a:solidFill>
-              </a:defRPr>
-            </a:pPr>
-            <a:r>
-              <a:t>Live Governance Workflow: Decommissioning GPT-4o Fraud Analyzer</a:t>
-            </a:r>
-          </a:p>
-        </p:txBody>
-      </p:sp>
-      <p:sp>
-        <p:nvSpPr>
-          <p:cNvPr id="5" name="Rounded Rectangle 4"/>
+              <a:defRPr sz="900" b="1">
+                <a:solidFill>
+                  <a:srgbClr val="06B6D4"/>
+                </a:solidFill>
+              </a:defRPr>
+            </a:pPr>
+            <a:r>
+              <a:t>GUARDIANIQ ENTERPRISE AI GOVERNANCE PLATFORM</a:t>
+            </a:r>
+          </a:p>
+          <a:p>
+            <a:pPr>
+              <a:defRPr sz="2000" b="1">
+                <a:solidFill>
+                  <a:srgbClr val="F8FAFC"/>
+                </a:solidFill>
+              </a:defRPr>
+            </a:pPr>
+            <a:r>
+              <a:t>Live Governance Execution: Fraud Sentinel Decommission Simulation</a:t>
+            </a:r>
+          </a:p>
+        </p:txBody>
+      </p:sp>
+      <p:sp>
+        <p:nvSpPr>
+          <p:cNvPr id="3" name="Rounded Rectangle 2"/>
           <p:cNvSpPr/>
           <p:nvPr/>
         </p:nvSpPr>
         <p:spPr>
           <a:xfrm>
-            <a:off x="731520" y="1371600"/>
-            <a:ext cx="10698480" cy="1051560"/>
+            <a:off x="731520" y="1645920"/>
+            <a:ext cx="2560320" cy="4389120"/>
           </a:xfrm>
           <a:prstGeom prst="roundRect">
             <a:avLst/>
@@ -6961,14 +6956,94 @@
       </p:sp>
       <p:sp>
         <p:nvSpPr>
+          <p:cNvPr id="4" name="Rounded Rectangle 3"/>
+          <p:cNvSpPr/>
+          <p:nvPr/>
+        </p:nvSpPr>
+        <p:spPr>
+          <a:xfrm>
+            <a:off x="914400" y="1828800"/>
+            <a:ext cx="2194560" cy="548640"/>
+          </a:xfrm>
+          <a:prstGeom prst="roundRect">
+            <a:avLst/>
+          </a:prstGeom>
+          <a:solidFill>
+            <a:srgbClr val="0F172A"/>
+          </a:solidFill>
+          <a:ln w="12700">
+            <a:solidFill>
+              <a:srgbClr val="06B6D4"/>
+            </a:solidFill>
+          </a:ln>
+        </p:spPr>
+        <p:style>
+          <a:lnRef idx="1">
+            <a:schemeClr val="accent1"/>
+          </a:lnRef>
+          <a:fillRef idx="3">
+            <a:schemeClr val="accent1"/>
+          </a:fillRef>
+          <a:effectRef idx="2">
+            <a:schemeClr val="accent1"/>
+          </a:effectRef>
+          <a:fontRef idx="minor">
+            <a:schemeClr val="lt1"/>
+          </a:fontRef>
+        </p:style>
+        <p:txBody>
+          <a:bodyPr rtlCol="0" anchor="ctr"/>
+          <a:lstStyle/>
+          <a:p>
+            <a:pPr algn="ctr"/>
+          </a:p>
+        </p:txBody>
+      </p:sp>
+      <p:sp>
+        <p:nvSpPr>
+          <p:cNvPr id="5" name="TextBox 4"/>
+          <p:cNvSpPr txBox="1"/>
+          <p:nvPr/>
+        </p:nvSpPr>
+        <p:spPr>
+          <a:xfrm>
+            <a:off x="914400" y="1874519"/>
+            <a:ext cx="2194560" cy="457200"/>
+          </a:xfrm>
+          <a:prstGeom prst="rect">
+            <a:avLst/>
+          </a:prstGeom>
+          <a:noFill/>
+        </p:spPr>
+        <p:txBody>
+          <a:bodyPr wrap="none">
+            <a:spAutoFit/>
+          </a:bodyPr>
+          <a:lstStyle/>
+          <a:p>
+            <a:pPr algn="ctr">
+              <a:defRPr sz="1100" b="1">
+                <a:solidFill>
+                  <a:srgbClr val="06B6D4"/>
+                </a:solidFill>
+              </a:defRPr>
+            </a:pPr>
+            <a:r>
+              <a:t>PHASE 01</a:t>
+            </a:r>
+          </a:p>
+        </p:txBody>
+      </p:sp>
+      <p:sp>
+        <p:nvSpPr>
           <p:cNvPr id="6" name="TextBox 5"/>
           <p:cNvSpPr txBox="1"/>
           <p:nvPr/>
         </p:nvSpPr>
         <p:spPr>
           <a:xfrm>
-            <a:off x="914400" y="1508760"/>
-            <a:ext cx="10332720" cy="777240"/>
+            <a:off x="914400" y="2560320"/>
+            <a:ext cx="2194560" cy="3291840"/>
           </a:xfrm>
           <a:prstGeom prst="rect">
             <a:avLst/>
@@ -6983,28 +7058,28 @@
           <a:p>
             <a:pPr>
               <a:spcAft>
-                <a:spcPts val="400"/>
+                <a:spcPts val="1000"/>
               </a:spcAft>
-              <a:defRPr sz="1400" b="1">
-                <a:solidFill>
-                  <a:srgbClr val="38BDF8"/>
-                </a:solidFill>
-              </a:defRPr>
-            </a:pPr>
-            <a:r>
-              <a:t>Step 1: Action Trigger</a:t>
-            </a:r>
-          </a:p>
-          <a:p>
-            <a:pPr>
-              <a:defRPr sz="1100">
-                <a:solidFill>
-                  <a:srgbClr val="FFFFFF"/>
-                </a:solidFill>
-              </a:defRPr>
-            </a:pPr>
-            <a:r>
-              <a:t>Operator initiates a REVOKE (Decommission) request on GPT-4o Fraud Analyzer in the Registry.</a:t>
+              <a:defRPr sz="1100" b="1">
+                <a:solidFill>
+                  <a:srgbClr val="F8FAFC"/>
+                </a:solidFill>
+              </a:defRPr>
+            </a:pPr>
+            <a:r>
+              <a:t>STEP 1: ACTION TRIGGER</a:t>
+            </a:r>
+          </a:p>
+          <a:p>
+            <a:pPr>
+              <a:defRPr sz="1000">
+                <a:solidFill>
+                  <a:srgbClr val="94A3B8"/>
+                </a:solidFill>
+              </a:defRPr>
+            </a:pPr>
+            <a:r>
+              <a:t>Operator initiates REVOKE (Decommission) on GPT-4o Fraud Analyzer in Registry.</a:t>
             </a:r>
           </a:p>
         </p:txBody>
@@ -7017,8 +7092,8 @@
         </p:nvSpPr>
         <p:spPr>
           <a:xfrm>
-            <a:off x="731520" y="2560320"/>
-            <a:ext cx="10698480" cy="1051560"/>
+            <a:off x="3456432" y="1645920"/>
+            <a:ext cx="2560320" cy="4389120"/>
           </a:xfrm>
           <a:prstGeom prst="roundRect">
             <a:avLst/>
@@ -7056,14 +7131,94 @@
       </p:sp>
       <p:sp>
         <p:nvSpPr>
-          <p:cNvPr id="8" name="TextBox 7"/>
+          <p:cNvPr id="8" name="Rounded Rectangle 7"/>
+          <p:cNvSpPr/>
+          <p:nvPr/>
+        </p:nvSpPr>
+        <p:spPr>
+          <a:xfrm>
+            <a:off x="3639312" y="1828800"/>
+            <a:ext cx="2194560" cy="548640"/>
+          </a:xfrm>
+          <a:prstGeom prst="roundRect">
+            <a:avLst/>
+          </a:prstGeom>
+          <a:solidFill>
+            <a:srgbClr val="0F172A"/>
+          </a:solidFill>
+          <a:ln w="12700">
+            <a:solidFill>
+              <a:srgbClr val="38BDF8"/>
+            </a:solidFill>
+          </a:ln>
+        </p:spPr>
+        <p:style>
+          <a:lnRef idx="1">
+            <a:schemeClr val="accent1"/>
+          </a:lnRef>
+          <a:fillRef idx="3">
+            <a:schemeClr val="accent1"/>
+          </a:fillRef>
+          <a:effectRef idx="2">
+            <a:schemeClr val="accent1"/>
+          </a:effectRef>
+          <a:fontRef idx="minor">
+            <a:schemeClr val="lt1"/>
+          </a:fontRef>
+        </p:style>
+        <p:txBody>
+          <a:bodyPr rtlCol="0" anchor="ctr"/>
+          <a:lstStyle/>
+          <a:p>
+            <a:pPr algn="ctr"/>
+          </a:p>
+        </p:txBody>
+      </p:sp>
+      <p:sp>
+        <p:nvSpPr>
+          <p:cNvPr id="9" name="TextBox 8"/>
           <p:cNvSpPr txBox="1"/>
           <p:nvPr/>
         </p:nvSpPr>
         <p:spPr>
           <a:xfrm>
-            <a:off x="914400" y="2697479"/>
-            <a:ext cx="10332720" cy="777240"/>
+            <a:off x="3639312" y="1874519"/>
+            <a:ext cx="2194560" cy="457200"/>
+          </a:xfrm>
+          <a:prstGeom prst="rect">
+            <a:avLst/>
+          </a:prstGeom>
+          <a:noFill/>
+        </p:spPr>
+        <p:txBody>
+          <a:bodyPr wrap="none">
+            <a:spAutoFit/>
+          </a:bodyPr>
+          <a:lstStyle/>
+          <a:p>
+            <a:pPr algn="ctr">
+              <a:defRPr sz="1100" b="1">
+                <a:solidFill>
+                  <a:srgbClr val="38BDF8"/>
+                </a:solidFill>
+              </a:defRPr>
+            </a:pPr>
+            <a:r>
+              <a:t>PHASE 02</a:t>
+            </a:r>
+          </a:p>
+        </p:txBody>
+      </p:sp>
+      <p:sp>
+        <p:nvSpPr>
+          <p:cNvPr id="10" name="TextBox 9"/>
+          <p:cNvSpPr txBox="1"/>
+          <p:nvPr/>
+        </p:nvSpPr>
+        <p:spPr>
+          <a:xfrm>
+            <a:off x="3639312" y="2560320"/>
+            <a:ext cx="2194560" cy="3291840"/>
           </a:xfrm>
           <a:prstGeom prst="rect">
             <a:avLst/>
@@ -7078,42 +7233,42 @@
           <a:p>
             <a:pPr>
               <a:spcAft>
-                <a:spcPts val="400"/>
+                <a:spcPts val="1000"/>
               </a:spcAft>
-              <a:defRPr sz="1400" b="1">
-                <a:solidFill>
-                  <a:srgbClr val="38BDF8"/>
-                </a:solidFill>
-              </a:defRPr>
-            </a:pPr>
-            <a:r>
-              <a:t>Step 2: Impact Pre-Flight</a:t>
-            </a:r>
-          </a:p>
-          <a:p>
-            <a:pPr>
-              <a:defRPr sz="1100">
-                <a:solidFill>
-                  <a:srgbClr val="FFFFFF"/>
-                </a:solidFill>
-              </a:defRPr>
-            </a:pPr>
-            <a:r>
-              <a:t>Validation Engine executes 5-Hop Graph Traversal to calculate the full downstream blast radius.</a:t>
-            </a:r>
-          </a:p>
-        </p:txBody>
-      </p:sp>
-      <p:sp>
-        <p:nvSpPr>
-          <p:cNvPr id="9" name="Rounded Rectangle 8"/>
+              <a:defRPr sz="1100" b="1">
+                <a:solidFill>
+                  <a:srgbClr val="F8FAFC"/>
+                </a:solidFill>
+              </a:defRPr>
+            </a:pPr>
+            <a:r>
+              <a:t>STEP 2: PRE-FLIGHT TRAVERSAL</a:t>
+            </a:r>
+          </a:p>
+          <a:p>
+            <a:pPr>
+              <a:defRPr sz="1000">
+                <a:solidFill>
+                  <a:srgbClr val="94A3B8"/>
+                </a:solidFill>
+              </a:defRPr>
+            </a:pPr>
+            <a:r>
+              <a:t>ValidationEngine executes 5-Hop Graph Traversal to map downstream dependencies.</a:t>
+            </a:r>
+          </a:p>
+        </p:txBody>
+      </p:sp>
+      <p:sp>
+        <p:nvSpPr>
+          <p:cNvPr id="11" name="Rounded Rectangle 10"/>
           <p:cNvSpPr/>
           <p:nvPr/>
         </p:nvSpPr>
         <p:spPr>
           <a:xfrm>
-            <a:off x="731520" y="3749039"/>
-            <a:ext cx="10698480" cy="1051560"/>
+            <a:off x="6181344" y="1645920"/>
+            <a:ext cx="2560320" cy="4389120"/>
           </a:xfrm>
           <a:prstGeom prst="roundRect">
             <a:avLst/>
@@ -7151,14 +7306,94 @@
       </p:sp>
       <p:sp>
         <p:nvSpPr>
-          <p:cNvPr id="10" name="TextBox 9"/>
+          <p:cNvPr id="12" name="Rounded Rectangle 11"/>
+          <p:cNvSpPr/>
+          <p:nvPr/>
+        </p:nvSpPr>
+        <p:spPr>
+          <a:xfrm>
+            <a:off x="6364224" y="1828800"/>
+            <a:ext cx="2194560" cy="548640"/>
+          </a:xfrm>
+          <a:prstGeom prst="roundRect">
+            <a:avLst/>
+          </a:prstGeom>
+          <a:solidFill>
+            <a:srgbClr val="0F172A"/>
+          </a:solidFill>
+          <a:ln w="12700">
+            <a:solidFill>
+              <a:srgbClr val="F59E0B"/>
+            </a:solidFill>
+          </a:ln>
+        </p:spPr>
+        <p:style>
+          <a:lnRef idx="1">
+            <a:schemeClr val="accent1"/>
+          </a:lnRef>
+          <a:fillRef idx="3">
+            <a:schemeClr val="accent1"/>
+          </a:fillRef>
+          <a:effectRef idx="2">
+            <a:schemeClr val="accent1"/>
+          </a:effectRef>
+          <a:fontRef idx="minor">
+            <a:schemeClr val="lt1"/>
+          </a:fontRef>
+        </p:style>
+        <p:txBody>
+          <a:bodyPr rtlCol="0" anchor="ctr"/>
+          <a:lstStyle/>
+          <a:p>
+            <a:pPr algn="ctr"/>
+          </a:p>
+        </p:txBody>
+      </p:sp>
+      <p:sp>
+        <p:nvSpPr>
+          <p:cNvPr id="13" name="TextBox 12"/>
           <p:cNvSpPr txBox="1"/>
           <p:nvPr/>
         </p:nvSpPr>
         <p:spPr>
           <a:xfrm>
-            <a:off x="914400" y="3886200"/>
-            <a:ext cx="10332720" cy="777240"/>
+            <a:off x="6364224" y="1874519"/>
+            <a:ext cx="2194560" cy="457200"/>
+          </a:xfrm>
+          <a:prstGeom prst="rect">
+            <a:avLst/>
+          </a:prstGeom>
+          <a:noFill/>
+        </p:spPr>
+        <p:txBody>
+          <a:bodyPr wrap="none">
+            <a:spAutoFit/>
+          </a:bodyPr>
+          <a:lstStyle/>
+          <a:p>
+            <a:pPr algn="ctr">
+              <a:defRPr sz="1100" b="1">
+                <a:solidFill>
+                  <a:srgbClr val="F59E0B"/>
+                </a:solidFill>
+              </a:defRPr>
+            </a:pPr>
+            <a:r>
+              <a:t>PHASE 03</a:t>
+            </a:r>
+          </a:p>
+        </p:txBody>
+      </p:sp>
+      <p:sp>
+        <p:nvSpPr>
+          <p:cNvPr id="14" name="TextBox 13"/>
+          <p:cNvSpPr txBox="1"/>
+          <p:nvPr/>
+        </p:nvSpPr>
+        <p:spPr>
+          <a:xfrm>
+            <a:off x="6364224" y="2560320"/>
+            <a:ext cx="2194560" cy="3291840"/>
           </a:xfrm>
           <a:prstGeom prst="rect">
             <a:avLst/>
@@ -7173,42 +7408,42 @@
           <a:p>
             <a:pPr>
               <a:spcAft>
-                <a:spcPts val="400"/>
+                <a:spcPts val="1000"/>
               </a:spcAft>
-              <a:defRPr sz="1400" b="1">
-                <a:solidFill>
-                  <a:srgbClr val="38BDF8"/>
-                </a:solidFill>
-              </a:defRPr>
-            </a:pPr>
-            <a:r>
-              <a:t>Step 3: Risk Calculation</a:t>
-            </a:r>
-          </a:p>
-          <a:p>
-            <a:pPr>
-              <a:defRPr sz="1100">
-                <a:solidFill>
-                  <a:srgbClr val="FFFFFF"/>
-                </a:solidFill>
-              </a:defRPr>
-            </a:pPr>
-            <a:r>
-              <a:t>System detects HIGH RISK impact: 1 Direct Dependent ('Autonomous Fraud Sentinel') &amp; 3 Transitive Hops.</a:t>
-            </a:r>
-          </a:p>
-        </p:txBody>
-      </p:sp>
-      <p:sp>
-        <p:nvSpPr>
-          <p:cNvPr id="11" name="Rounded Rectangle 10"/>
+              <a:defRPr sz="1100" b="1">
+                <a:solidFill>
+                  <a:srgbClr val="F8FAFC"/>
+                </a:solidFill>
+              </a:defRPr>
+            </a:pPr>
+            <a:r>
+              <a:t>STEP 3: RISK ASSESSMENT</a:t>
+            </a:r>
+          </a:p>
+          <a:p>
+            <a:pPr>
+              <a:defRPr sz="1000">
+                <a:solidFill>
+                  <a:srgbClr val="94A3B8"/>
+                </a:solidFill>
+              </a:defRPr>
+            </a:pPr>
+            <a:r>
+              <a:t>System detects HIGH RISK: 1 Direct Dependent (Autonomous Fraud Sentinel) + 3 Transitive Hops.</a:t>
+            </a:r>
+          </a:p>
+        </p:txBody>
+      </p:sp>
+      <p:sp>
+        <p:nvSpPr>
+          <p:cNvPr id="15" name="Rounded Rectangle 14"/>
           <p:cNvSpPr/>
           <p:nvPr/>
         </p:nvSpPr>
         <p:spPr>
           <a:xfrm>
-            <a:off x="731520" y="4937760"/>
-            <a:ext cx="10698480" cy="1051560"/>
+            <a:off x="8906256" y="1645920"/>
+            <a:ext cx="2560320" cy="4389120"/>
           </a:xfrm>
           <a:prstGeom prst="roundRect">
             <a:avLst/>
@@ -7246,14 +7481,94 @@
       </p:sp>
       <p:sp>
         <p:nvSpPr>
-          <p:cNvPr id="12" name="TextBox 11"/>
+          <p:cNvPr id="16" name="Rounded Rectangle 15"/>
+          <p:cNvSpPr/>
+          <p:nvPr/>
+        </p:nvSpPr>
+        <p:spPr>
+          <a:xfrm>
+            <a:off x="9089136" y="1828800"/>
+            <a:ext cx="2194560" cy="548640"/>
+          </a:xfrm>
+          <a:prstGeom prst="roundRect">
+            <a:avLst/>
+          </a:prstGeom>
+          <a:solidFill>
+            <a:srgbClr val="0F172A"/>
+          </a:solidFill>
+          <a:ln w="12700">
+            <a:solidFill>
+              <a:srgbClr val="10B981"/>
+            </a:solidFill>
+          </a:ln>
+        </p:spPr>
+        <p:style>
+          <a:lnRef idx="1">
+            <a:schemeClr val="accent1"/>
+          </a:lnRef>
+          <a:fillRef idx="3">
+            <a:schemeClr val="accent1"/>
+          </a:fillRef>
+          <a:effectRef idx="2">
+            <a:schemeClr val="accent1"/>
+          </a:effectRef>
+          <a:fontRef idx="minor">
+            <a:schemeClr val="lt1"/>
+          </a:fontRef>
+        </p:style>
+        <p:txBody>
+          <a:bodyPr rtlCol="0" anchor="ctr"/>
+          <a:lstStyle/>
+          <a:p>
+            <a:pPr algn="ctr"/>
+          </a:p>
+        </p:txBody>
+      </p:sp>
+      <p:sp>
+        <p:nvSpPr>
+          <p:cNvPr id="17" name="TextBox 16"/>
           <p:cNvSpPr txBox="1"/>
           <p:nvPr/>
         </p:nvSpPr>
         <p:spPr>
           <a:xfrm>
-            <a:off x="914400" y="5074920"/>
-            <a:ext cx="10332720" cy="777240"/>
+            <a:off x="9089136" y="1874519"/>
+            <a:ext cx="2194560" cy="457200"/>
+          </a:xfrm>
+          <a:prstGeom prst="rect">
+            <a:avLst/>
+          </a:prstGeom>
+          <a:noFill/>
+        </p:spPr>
+        <p:txBody>
+          <a:bodyPr wrap="none">
+            <a:spAutoFit/>
+          </a:bodyPr>
+          <a:lstStyle/>
+          <a:p>
+            <a:pPr algn="ctr">
+              <a:defRPr sz="1100" b="1">
+                <a:solidFill>
+                  <a:srgbClr val="10B981"/>
+                </a:solidFill>
+              </a:defRPr>
+            </a:pPr>
+            <a:r>
+              <a:t>PHASE 04</a:t>
+            </a:r>
+          </a:p>
+        </p:txBody>
+      </p:sp>
+      <p:sp>
+        <p:nvSpPr>
+          <p:cNvPr id="18" name="TextBox 17"/>
+          <p:cNvSpPr txBox="1"/>
+          <p:nvPr/>
+        </p:nvSpPr>
+        <p:spPr>
+          <a:xfrm>
+            <a:off x="9089136" y="2560320"/>
+            <a:ext cx="2194560" cy="3291840"/>
           </a:xfrm>
           <a:prstGeom prst="rect">
             <a:avLst/>
@@ -7268,28 +7583,28 @@
           <a:p>
             <a:pPr>
               <a:spcAft>
-                <a:spcPts val="400"/>
+                <a:spcPts val="1000"/>
               </a:spcAft>
-              <a:defRPr sz="1400" b="1">
-                <a:solidFill>
-                  <a:srgbClr val="38BDF8"/>
-                </a:solidFill>
-              </a:defRPr>
-            </a:pPr>
-            <a:r>
-              <a:t>Step 4: Governance Enforcement</a:t>
-            </a:r>
-          </a:p>
-          <a:p>
-            <a:pPr>
-              <a:defRPr sz="1100">
-                <a:solidFill>
-                  <a:srgbClr val="FFFFFF"/>
-                </a:solidFill>
-              </a:defRPr>
-            </a:pPr>
-            <a:r>
-              <a:t>Action blocked automatically. System requires formal approval from Primary Owner Elena Rodriguez.</a:t>
+              <a:defRPr sz="1100" b="1">
+                <a:solidFill>
+                  <a:srgbClr val="F8FAFC"/>
+                </a:solidFill>
+              </a:defRPr>
+            </a:pPr>
+            <a:r>
+              <a:t>STEP 4: AUTOMATED GOVERNANCE GATE</a:t>
+            </a:r>
+          </a:p>
+          <a:p>
+            <a:pPr>
+              <a:defRPr sz="1000">
+                <a:solidFill>
+                  <a:srgbClr val="94A3B8"/>
+                </a:solidFill>
+              </a:defRPr>
+            </a:pPr>
+            <a:r>
+              <a:t>Action blocked automatically. Requires formal approval from Primary Owner (Elena Rodriguez).</a:t>
             </a:r>
           </a:p>
         </p:txBody>
@@ -7305,6 +7620,14 @@
 <file path=ppt/slides/slide9.xml><?xml version="1.0" encoding="utf-8"?>
 <p:sld xmlns:a="http://schemas.openxmlformats.org/drawingml/2006/main" xmlns:p="http://schemas.openxmlformats.org/presentationml/2006/main" xmlns:r="http://schemas.openxmlformats.org/officeDocument/2006/relationships">
   <p:cSld>
+    <p:bg>
+      <p:bgPr>
+        <a:solidFill>
+          <a:srgbClr val="0F172A"/>
+        </a:solidFill>
+        <a:effectLst/>
+      </p:bgPr>
+    </p:bg>
     <p:spTree>
       <p:nvGrpSpPr>
         <p:cNvPr id="1" name=""/>
@@ -7314,129 +7637,85 @@
       <p:grpSpPr/>
       <p:sp>
         <p:nvSpPr>
-          <p:cNvPr id="2" name="Rectangle 1"/>
-          <p:cNvSpPr/>
-          <p:nvPr/>
-        </p:nvSpPr>
-        <p:spPr>
-          <a:xfrm>
-            <a:off x="0" y="0"/>
-            <a:ext cx="12191695" cy="6858000"/>
+          <p:cNvPr id="2" name="TextBox 1"/>
+          <p:cNvSpPr txBox="1"/>
+          <p:nvPr/>
+        </p:nvSpPr>
+        <p:spPr>
+          <a:xfrm>
+            <a:off x="731520" y="365760"/>
+            <a:ext cx="10728655" cy="822960"/>
           </a:xfrm>
           <a:prstGeom prst="rect">
             <a:avLst/>
           </a:prstGeom>
-          <a:solidFill>
-            <a:srgbClr val="0F172A"/>
-          </a:solidFill>
-          <a:ln>
-            <a:solidFill>
-              <a:srgbClr val="0F172A"/>
-            </a:solidFill>
-          </a:ln>
-        </p:spPr>
-        <p:style>
-          <a:lnRef idx="1">
-            <a:schemeClr val="accent1"/>
-          </a:lnRef>
-          <a:fillRef idx="3">
-            <a:schemeClr val="accent1"/>
-          </a:fillRef>
-          <a:effectRef idx="2">
-            <a:schemeClr val="accent1"/>
-          </a:effectRef>
-          <a:fontRef idx="minor">
-            <a:schemeClr val="lt1"/>
-          </a:fontRef>
-        </p:style>
-        <p:txBody>
-          <a:bodyPr rtlCol="0" anchor="ctr"/>
-          <a:lstStyle/>
-          <a:p>
-            <a:pPr algn="ctr"/>
-          </a:p>
-        </p:txBody>
-      </p:sp>
-      <p:sp>
-        <p:nvSpPr>
-          <p:cNvPr id="3" name="TextBox 2"/>
-          <p:cNvSpPr txBox="1"/>
-          <p:nvPr/>
-        </p:nvSpPr>
-        <p:spPr>
-          <a:xfrm>
-            <a:off x="731520" y="365760"/>
-            <a:ext cx="10698480" cy="365760"/>
-          </a:xfrm>
-          <a:prstGeom prst="rect">
-            <a:avLst/>
-          </a:prstGeom>
           <a:noFill/>
         </p:spPr>
         <p:txBody>
-          <a:bodyPr wrap="square">
+          <a:bodyPr wrap="square" lIns="0" tIns="0" rIns="0" bIns="0">
             <a:spAutoFit/>
           </a:bodyPr>
           <a:lstStyle/>
           <a:p>
             <a:pPr>
-              <a:defRPr sz="1000" b="1">
-                <a:solidFill>
-                  <a:srgbClr val="38BDF8"/>
-                </a:solidFill>
-              </a:defRPr>
-            </a:pPr>
-            <a:r>
-              <a:t>NON-FUNCTIONAL &amp; SECURITY BENCHMARKS</a:t>
-            </a:r>
-          </a:p>
-        </p:txBody>
-      </p:sp>
-      <p:sp>
-        <p:nvSpPr>
-          <p:cNvPr id="4" name="TextBox 3"/>
-          <p:cNvSpPr txBox="1"/>
-          <p:nvPr/>
-        </p:nvSpPr>
-        <p:spPr>
-          <a:xfrm>
-            <a:off x="731520" y="640080"/>
-            <a:ext cx="10698480" cy="548640"/>
+              <a:defRPr sz="900" b="1">
+                <a:solidFill>
+                  <a:srgbClr val="06B6D4"/>
+                </a:solidFill>
+              </a:defRPr>
+            </a:pPr>
+            <a:r>
+              <a:t>GUARDIANIQ ENTERPRISE AI GOVERNANCE PLATFORM</a:t>
+            </a:r>
+          </a:p>
+          <a:p>
+            <a:pPr>
+              <a:defRPr sz="2000" b="1">
+                <a:solidFill>
+                  <a:srgbClr val="F8FAFC"/>
+                </a:solidFill>
+              </a:defRPr>
+            </a:pPr>
+            <a:r>
+              <a:t>CTO Performance Benchmarks &amp; Security Isolation Audit</a:t>
+            </a:r>
+          </a:p>
+        </p:txBody>
+      </p:sp>
+      <p:pic>
+        <p:nvPicPr>
+          <p:cNvPr id="3" name="Picture 2" descr="chart3_latency.png"/>
+          <p:cNvPicPr>
+            <a:picLocks noChangeAspect="1"/>
+          </p:cNvPicPr>
+          <p:nvPr/>
+        </p:nvPicPr>
+        <p:blipFill>
+          <a:blip r:embed="rId2"/>
+          <a:stretch>
+            <a:fillRect/>
+          </a:stretch>
+        </p:blipFill>
+        <p:spPr>
+          <a:xfrm>
+            <a:off x="731520" y="1371600"/>
+            <a:ext cx="6035040" cy="4937760"/>
           </a:xfrm>
           <a:prstGeom prst="rect">
             <a:avLst/>
           </a:prstGeom>
-          <a:noFill/>
-        </p:spPr>
-        <p:txBody>
-          <a:bodyPr wrap="square">
-            <a:spAutoFit/>
-          </a:bodyPr>
-          <a:lstStyle/>
-          <a:p>
-            <a:pPr>
-              <a:defRPr sz="2200" b="1">
-                <a:solidFill>
-                  <a:srgbClr val="FFFFFF"/>
-                </a:solidFill>
-              </a:defRPr>
-            </a:pPr>
-            <a:r>
-              <a:t>Performance Latencies &amp; Multi-Tenant Security Audit</a:t>
-            </a:r>
-          </a:p>
-        </p:txBody>
-      </p:sp>
-      <p:sp>
-        <p:nvSpPr>
-          <p:cNvPr id="5" name="Rounded Rectangle 4"/>
+        </p:spPr>
+      </p:pic>
+      <p:sp>
+        <p:nvSpPr>
+          <p:cNvPr id="4" name="Rounded Rectangle 3"/>
           <p:cNvSpPr/>
           <p:nvPr/>
         </p:nvSpPr>
         <p:spPr>
           <a:xfrm>
-            <a:off x="731520" y="1371600"/>
-            <a:ext cx="5212080" cy="4754880"/>
+            <a:off x="6949440" y="1371600"/>
+            <a:ext cx="4510735" cy="4937760"/>
           </a:xfrm>
           <a:prstGeom prst="roundRect">
             <a:avLst/>
@@ -7474,14 +7753,14 @@
       </p:sp>
       <p:sp>
         <p:nvSpPr>
-          <p:cNvPr id="6" name="TextBox 5"/>
+          <p:cNvPr id="5" name="TextBox 4"/>
           <p:cNvSpPr txBox="1"/>
           <p:nvPr/>
         </p:nvSpPr>
         <p:spPr>
           <a:xfrm>
-            <a:off x="914400" y="1554480"/>
-            <a:ext cx="4846320" cy="4389120"/>
+            <a:off x="7132320" y="1554480"/>
+            <a:ext cx="4144975" cy="4572000"/>
           </a:xfrm>
           <a:prstGeom prst="rect">
             <a:avLst/>
@@ -7496,306 +7775,124 @@
           <a:p>
             <a:pPr>
               <a:spcAft>
-                <a:spcPts val="1200"/>
+                <a:spcPts val="1000"/>
               </a:spcAft>
-              <a:defRPr sz="1500" b="1">
-                <a:solidFill>
-                  <a:srgbClr val="38BDF8"/>
-                </a:solidFill>
-              </a:defRPr>
-            </a:pPr>
-            <a:r>
-              <a:t>⚡ Performance Latency Benchmarks</a:t>
+              <a:defRPr sz="1400" b="1">
+                <a:solidFill>
+                  <a:srgbClr val="10B981"/>
+                </a:solidFill>
+              </a:defRPr>
+            </a:pPr>
+            <a:r>
+              <a:t>🔒 Security &amp; Compliance Audit</a:t>
+            </a:r>
+          </a:p>
+          <a:p>
+            <a:pPr>
+              <a:defRPr sz="1100" b="1">
+                <a:solidFill>
+                  <a:srgbClr val="F8FAFC"/>
+                </a:solidFill>
+              </a:defRPr>
+            </a:pPr>
+            <a:r>
+              <a:t>• Multi-Tenant Isolation:</a:t>
             </a:r>
           </a:p>
           <a:p>
             <a:pPr>
               <a:spcAft>
-                <a:spcPts val="800"/>
+                <a:spcPts val="600"/>
               </a:spcAft>
+              <a:defRPr sz="950">
+                <a:solidFill>
+                  <a:srgbClr val="94A3B8"/>
+                </a:solidFill>
+              </a:defRPr>
+            </a:pPr>
+            <a:r>
+              <a:t>  Every relationship and responsibility query enforces strict UUID tenant_id filtering. Zero cross-tenant data leaks verified.</a:t>
+            </a:r>
+          </a:p>
+          <a:p>
+            <a:pPr>
               <a:defRPr sz="1100" b="1">
                 <a:solidFill>
-                  <a:srgbClr val="FFFFFF"/>
-                </a:solidFill>
-              </a:defRPr>
-            </a:pPr>
-            <a:r>
-              <a:t>• Direct Lookup (Depth 1): </a:t>
-            </a:r>
-            <a:r>
-              <a:rPr b="0">
-                <a:solidFill>
-                  <a:srgbClr val="22C55E"/>
-                </a:solidFill>
-              </a:rPr>
-              <a:t>12 ms (Cached: 1.2 ms)  🟢 PASS</a:t>
+                  <a:srgbClr val="F8FAFC"/>
+                </a:solidFill>
+              </a:defRPr>
+            </a:pPr>
+            <a:r>
+              <a:t>• Zero Hardcoded Secrets:</a:t>
             </a:r>
           </a:p>
           <a:p>
             <a:pPr>
               <a:spcAft>
-                <a:spcPts val="800"/>
+                <a:spcPts val="600"/>
               </a:spcAft>
+              <a:defRPr sz="950">
+                <a:solidFill>
+                  <a:srgbClr val="94A3B8"/>
+                </a:solidFill>
+              </a:defRPr>
+            </a:pPr>
+            <a:r>
+              <a:t>  All database credentials, JWT secrets, and environment tokens are managed strictly via environment variables.</a:t>
+            </a:r>
+          </a:p>
+          <a:p>
+            <a:pPr>
               <a:defRPr sz="1100" b="1">
                 <a:solidFill>
-                  <a:srgbClr val="FFFFFF"/>
-                </a:solidFill>
-              </a:defRPr>
-            </a:pPr>
-            <a:r>
-              <a:t>• Graph Traversal (Depth 3): </a:t>
-            </a:r>
-            <a:r>
-              <a:rPr b="0">
-                <a:solidFill>
-                  <a:srgbClr val="22C55E"/>
-                </a:solidFill>
-              </a:rPr>
-              <a:t>38 ms (Cached: 3.4 ms)  🟢 PASS</a:t>
+                  <a:srgbClr val="F8FAFC"/>
+                </a:solidFill>
+              </a:defRPr>
+            </a:pPr>
+            <a:r>
+              <a:t>• Transactional Integrity:</a:t>
             </a:r>
           </a:p>
           <a:p>
             <a:pPr>
               <a:spcAft>
-                <a:spcPts val="800"/>
+                <a:spcPts val="600"/>
               </a:spcAft>
+              <a:defRPr sz="950">
+                <a:solidFill>
+                  <a:srgbClr val="94A3B8"/>
+                </a:solidFill>
+              </a:defRPr>
+            </a:pPr>
+            <a:r>
+              <a:t>  Single active primary owner rule enforced via atomic database transactions with automatic rollback on failure.</a:t>
+            </a:r>
+          </a:p>
+          <a:p>
+            <a:pPr>
               <a:defRPr sz="1100" b="1">
                 <a:solidFill>
-                  <a:srgbClr val="FFFFFF"/>
-                </a:solidFill>
-              </a:defRPr>
-            </a:pPr>
-            <a:r>
-              <a:t>• Extended Graph (Depth 5): </a:t>
-            </a:r>
-            <a:r>
-              <a:rPr b="0">
-                <a:solidFill>
-                  <a:srgbClr val="22C55E"/>
-                </a:solidFill>
-              </a:rPr>
-              <a:t>84 ms (Cached: 4.1 ms)  🟢 PASS</a:t>
+                  <a:srgbClr val="F8FAFC"/>
+                </a:solidFill>
+              </a:defRPr>
+            </a:pPr>
+            <a:r>
+              <a:t>• Event Audit Logging:</a:t>
             </a:r>
           </a:p>
           <a:p>
             <a:pPr>
               <a:spcAft>
-                <a:spcPts val="800"/>
+                <a:spcPts val="600"/>
               </a:spcAft>
-              <a:defRPr sz="1100" b="1">
-                <a:solidFill>
-                  <a:srgbClr val="FFFFFF"/>
-                </a:solidFill>
-              </a:defRPr>
-            </a:pPr>
-            <a:r>
-              <a:t>• Validation Batch Dry-Run: </a:t>
-            </a:r>
-            <a:r>
-              <a:rPr b="0">
-                <a:solidFill>
-                  <a:srgbClr val="22C55E"/>
-                </a:solidFill>
-              </a:rPr>
-              <a:t>19 ms (Cached: 2.1 ms)  🟢 PASS</a:t>
-            </a:r>
-          </a:p>
-          <a:p>
-            <a:pPr>
-              <a:spcAft>
-                <a:spcPts val="800"/>
-              </a:spcAft>
-              <a:defRPr sz="1100" b="1">
-                <a:solidFill>
-                  <a:srgbClr val="FFFFFF"/>
-                </a:solidFill>
-              </a:defRPr>
-            </a:pPr>
-            <a:r>
-              <a:t>• Audit Timeline Aggregation: </a:t>
-            </a:r>
-            <a:r>
-              <a:rPr b="0">
-                <a:solidFill>
-                  <a:srgbClr val="22C55E"/>
-                </a:solidFill>
-              </a:rPr>
-              <a:t>26 ms (Cached: 2.8 ms)  🟢 PASS</a:t>
-            </a:r>
-          </a:p>
-        </p:txBody>
-      </p:sp>
-      <p:sp>
-        <p:nvSpPr>
-          <p:cNvPr id="7" name="Rounded Rectangle 6"/>
-          <p:cNvSpPr/>
-          <p:nvPr/>
-        </p:nvSpPr>
-        <p:spPr>
-          <a:xfrm>
-            <a:off x="6217920" y="1371600"/>
-            <a:ext cx="5212080" cy="4754880"/>
-          </a:xfrm>
-          <a:prstGeom prst="roundRect">
-            <a:avLst/>
-          </a:prstGeom>
-          <a:solidFill>
-            <a:srgbClr val="1E293B"/>
-          </a:solidFill>
-          <a:ln w="12700">
-            <a:solidFill>
-              <a:srgbClr val="334155"/>
-            </a:solidFill>
-          </a:ln>
-        </p:spPr>
-        <p:style>
-          <a:lnRef idx="1">
-            <a:schemeClr val="accent1"/>
-          </a:lnRef>
-          <a:fillRef idx="3">
-            <a:schemeClr val="accent1"/>
-          </a:fillRef>
-          <a:effectRef idx="2">
-            <a:schemeClr val="accent1"/>
-          </a:effectRef>
-          <a:fontRef idx="minor">
-            <a:schemeClr val="lt1"/>
-          </a:fontRef>
-        </p:style>
-        <p:txBody>
-          <a:bodyPr rtlCol="0" anchor="ctr"/>
-          <a:lstStyle/>
-          <a:p>
-            <a:pPr algn="ctr"/>
-          </a:p>
-        </p:txBody>
-      </p:sp>
-      <p:sp>
-        <p:nvSpPr>
-          <p:cNvPr id="8" name="TextBox 7"/>
-          <p:cNvSpPr txBox="1"/>
-          <p:nvPr/>
-        </p:nvSpPr>
-        <p:spPr>
-          <a:xfrm>
-            <a:off x="6400800" y="1554480"/>
-            <a:ext cx="4846320" cy="4389120"/>
-          </a:xfrm>
-          <a:prstGeom prst="rect">
-            <a:avLst/>
-          </a:prstGeom>
-          <a:noFill/>
-        </p:spPr>
-        <p:txBody>
-          <a:bodyPr wrap="square">
-            <a:spAutoFit/>
-          </a:bodyPr>
-          <a:lstStyle/>
-          <a:p>
-            <a:pPr>
-              <a:spcAft>
-                <a:spcPts val="1200"/>
-              </a:spcAft>
-              <a:defRPr sz="1500" b="1">
-                <a:solidFill>
-                  <a:srgbClr val="22C55E"/>
-                </a:solidFill>
-              </a:defRPr>
-            </a:pPr>
-            <a:r>
-              <a:t>🔒 Security &amp; Isolation Audit</a:t>
-            </a:r>
-          </a:p>
-          <a:p>
-            <a:pPr>
-              <a:spcAft>
-                <a:spcPts val="800"/>
-              </a:spcAft>
-              <a:defRPr sz="1100" b="1">
-                <a:solidFill>
-                  <a:srgbClr val="FFFFFF"/>
-                </a:solidFill>
-              </a:defRPr>
-            </a:pPr>
-            <a:r>
-              <a:t>• Multi-Tenant Isolation: </a:t>
-            </a:r>
-            <a:r>
-              <a:rPr b="0">
+              <a:defRPr sz="950">
                 <a:solidFill>
                   <a:srgbClr val="94A3B8"/>
                 </a:solidFill>
-              </a:rPr>
-              <a:t>Every relationship and responsibility query enforces strict tenant_id filtering. Zero cross-tenant data leaks.</a:t>
-            </a:r>
-          </a:p>
-          <a:p>
-            <a:pPr>
-              <a:spcAft>
-                <a:spcPts val="800"/>
-              </a:spcAft>
-              <a:defRPr sz="1100" b="1">
-                <a:solidFill>
-                  <a:srgbClr val="FFFFFF"/>
-                </a:solidFill>
-              </a:defRPr>
-            </a:pPr>
-            <a:r>
-              <a:t>• Zero Hardcoded Secrets: </a:t>
-            </a:r>
-            <a:r>
-              <a:rPr b="0">
-                <a:solidFill>
-                  <a:srgbClr val="94A3B8"/>
-                </a:solidFill>
-              </a:rPr>
-              <a:t>All DB credentials, JWT secrets, and environment tokens managed strictly via env vars.</a:t>
-            </a:r>
-          </a:p>
-          <a:p>
-            <a:pPr>
-              <a:spcAft>
-                <a:spcPts val="800"/>
-              </a:spcAft>
-              <a:defRPr sz="1100" b="1">
-                <a:solidFill>
-                  <a:srgbClr val="FFFFFF"/>
-                </a:solidFill>
-              </a:defRPr>
-            </a:pPr>
-            <a:r>
-              <a:t>• Transactional Integrity: </a:t>
-            </a:r>
-            <a:r>
-              <a:rPr b="0">
-                <a:solidFill>
-                  <a:srgbClr val="94A3B8"/>
-                </a:solidFill>
-              </a:rPr>
-              <a:t>Single active primary owner rule enforced via atomic DB transactions with rollback on failure.</a:t>
-            </a:r>
-          </a:p>
-          <a:p>
-            <a:pPr>
-              <a:spcAft>
-                <a:spcPts val="800"/>
-              </a:spcAft>
-              <a:defRPr sz="1100" b="1">
-                <a:solidFill>
-                  <a:srgbClr val="FFFFFF"/>
-                </a:solidFill>
-              </a:defRPr>
-            </a:pPr>
-            <a:r>
-              <a:t>• Audit Logging Compliance: </a:t>
-            </a:r>
-            <a:r>
-              <a:rPr b="0">
-                <a:solidFill>
-                  <a:srgbClr val="94A3B8"/>
-                </a:solidFill>
-              </a:rPr>
-              <a:t>All link creations, edits, and revocations publish structured audit events to GovernanceEventService.</a:t>
+              </a:defRPr>
+            </a:pPr>
+            <a:r>
+              <a:t>  All link creations, edits, and revocations publish structured audit events directly to GovernanceEventService.</a:t>
             </a:r>
           </a:p>
         </p:txBody>
